--- a/vizualizace.pptx
+++ b/vizualizace.pptx
@@ -4,6 +4,9 @@
   <p:sldMasterIdLst>
     <p:sldMasterId id="2147483648" r:id="rId1"/>
   </p:sldMasterIdLst>
+  <p:notesMasterIdLst>
+    <p:notesMasterId r:id="rId15"/>
+  </p:notesMasterIdLst>
   <p:sldIdLst>
     <p:sldId id="256" r:id="rId2"/>
     <p:sldId id="257" r:id="rId3"/>
@@ -11,10 +14,10 @@
     <p:sldId id="262" r:id="rId5"/>
     <p:sldId id="264" r:id="rId6"/>
     <p:sldId id="261" r:id="rId7"/>
-    <p:sldId id="268" r:id="rId8"/>
-    <p:sldId id="269" r:id="rId9"/>
-    <p:sldId id="265" r:id="rId10"/>
-    <p:sldId id="263" r:id="rId11"/>
+    <p:sldId id="269" r:id="rId8"/>
+    <p:sldId id="268" r:id="rId9"/>
+    <p:sldId id="263" r:id="rId10"/>
+    <p:sldId id="265" r:id="rId11"/>
     <p:sldId id="266" r:id="rId12"/>
     <p:sldId id="270" r:id="rId13"/>
     <p:sldId id="267" r:id="rId14"/>
@@ -124,6 +127,1334 @@
 </p:presentation>
 </file>
 
+<file path=ppt/notesMasters/notesMaster1.xml><?xml version="1.0" encoding="utf-8"?>
+<p:notesMaster xmlns:a="http://schemas.openxmlformats.org/drawingml/2006/main" xmlns:r="http://schemas.openxmlformats.org/officeDocument/2006/relationships" xmlns:p="http://schemas.openxmlformats.org/presentationml/2006/main">
+  <p:cSld>
+    <p:bg>
+      <p:bgRef idx="1001">
+        <a:schemeClr val="bg1"/>
+      </p:bgRef>
+    </p:bg>
+    <p:spTree>
+      <p:nvGrpSpPr>
+        <p:cNvPr id="1" name=""/>
+        <p:cNvGrpSpPr/>
+        <p:nvPr/>
+      </p:nvGrpSpPr>
+      <p:grpSpPr>
+        <a:xfrm>
+          <a:off x="0" y="0"/>
+          <a:ext cx="0" cy="0"/>
+          <a:chOff x="0" y="0"/>
+          <a:chExt cx="0" cy="0"/>
+        </a:xfrm>
+      </p:grpSpPr>
+      <p:sp>
+        <p:nvSpPr>
+          <p:cNvPr id="2" name="Zástupný symbol pro záhlaví 1"/>
+          <p:cNvSpPr>
+            <a:spLocks noGrp="1"/>
+          </p:cNvSpPr>
+          <p:nvPr>
+            <p:ph type="hdr" sz="quarter"/>
+          </p:nvPr>
+        </p:nvSpPr>
+        <p:spPr>
+          <a:xfrm>
+            <a:off x="0" y="0"/>
+            <a:ext cx="2971800" cy="458788"/>
+          </a:xfrm>
+          <a:prstGeom prst="rect">
+            <a:avLst/>
+          </a:prstGeom>
+        </p:spPr>
+        <p:txBody>
+          <a:bodyPr vert="horz" lIns="91440" tIns="45720" rIns="91440" bIns="45720" rtlCol="0"/>
+          <a:lstStyle>
+            <a:lvl1pPr algn="l">
+              <a:defRPr sz="1200"/>
+            </a:lvl1pPr>
+          </a:lstStyle>
+          <a:p>
+            <a:endParaRPr lang="cs-CZ"/>
+          </a:p>
+        </p:txBody>
+      </p:sp>
+      <p:sp>
+        <p:nvSpPr>
+          <p:cNvPr id="3" name="Zástupný symbol pro datum 2"/>
+          <p:cNvSpPr>
+            <a:spLocks noGrp="1"/>
+          </p:cNvSpPr>
+          <p:nvPr>
+            <p:ph type="dt" idx="1"/>
+          </p:nvPr>
+        </p:nvSpPr>
+        <p:spPr>
+          <a:xfrm>
+            <a:off x="3884613" y="0"/>
+            <a:ext cx="2971800" cy="458788"/>
+          </a:xfrm>
+          <a:prstGeom prst="rect">
+            <a:avLst/>
+          </a:prstGeom>
+        </p:spPr>
+        <p:txBody>
+          <a:bodyPr vert="horz" lIns="91440" tIns="45720" rIns="91440" bIns="45720" rtlCol="0"/>
+          <a:lstStyle>
+            <a:lvl1pPr algn="r">
+              <a:defRPr sz="1200"/>
+            </a:lvl1pPr>
+          </a:lstStyle>
+          <a:p>
+            <a:fld id="{C44EA4FD-BDB3-4440-8171-F3962DE3170E}" type="datetimeFigureOut">
+              <a:rPr lang="cs-CZ" smtClean="0"/>
+              <a:t>07.01.2026</a:t>
+            </a:fld>
+            <a:endParaRPr lang="cs-CZ"/>
+          </a:p>
+        </p:txBody>
+      </p:sp>
+      <p:sp>
+        <p:nvSpPr>
+          <p:cNvPr id="4" name="Zástupný symbol pro obrázek snímku 3"/>
+          <p:cNvSpPr>
+            <a:spLocks noGrp="1" noRot="1" noChangeAspect="1"/>
+          </p:cNvSpPr>
+          <p:nvPr>
+            <p:ph type="sldImg" idx="2"/>
+          </p:nvPr>
+        </p:nvSpPr>
+        <p:spPr>
+          <a:xfrm>
+            <a:off x="685800" y="1143000"/>
+            <a:ext cx="5486400" cy="3086100"/>
+          </a:xfrm>
+          <a:prstGeom prst="rect">
+            <a:avLst/>
+          </a:prstGeom>
+          <a:noFill/>
+          <a:ln w="12700">
+            <a:solidFill>
+              <a:prstClr val="black"/>
+            </a:solidFill>
+          </a:ln>
+        </p:spPr>
+        <p:txBody>
+          <a:bodyPr vert="horz" lIns="91440" tIns="45720" rIns="91440" bIns="45720" rtlCol="0" anchor="ctr"/>
+          <a:lstStyle/>
+          <a:p>
+            <a:endParaRPr lang="cs-CZ"/>
+          </a:p>
+        </p:txBody>
+      </p:sp>
+      <p:sp>
+        <p:nvSpPr>
+          <p:cNvPr id="5" name="Zástupný symbol pro poznámky 4"/>
+          <p:cNvSpPr>
+            <a:spLocks noGrp="1"/>
+          </p:cNvSpPr>
+          <p:nvPr>
+            <p:ph type="body" sz="quarter" idx="3"/>
+          </p:nvPr>
+        </p:nvSpPr>
+        <p:spPr>
+          <a:xfrm>
+            <a:off x="685800" y="4400550"/>
+            <a:ext cx="5486400" cy="3600450"/>
+          </a:xfrm>
+          <a:prstGeom prst="rect">
+            <a:avLst/>
+          </a:prstGeom>
+        </p:spPr>
+        <p:txBody>
+          <a:bodyPr vert="horz" lIns="91440" tIns="45720" rIns="91440" bIns="45720" rtlCol="0"/>
+          <a:lstStyle/>
+          <a:p>
+            <a:pPr lvl="0"/>
+            <a:r>
+              <a:rPr lang="cs-CZ"/>
+              <a:t>Po kliknutí můžete upravovat styly textu v předloze.</a:t>
+            </a:r>
+          </a:p>
+          <a:p>
+            <a:pPr lvl="1"/>
+            <a:r>
+              <a:rPr lang="cs-CZ"/>
+              <a:t>Druhá úroveň</a:t>
+            </a:r>
+          </a:p>
+          <a:p>
+            <a:pPr lvl="2"/>
+            <a:r>
+              <a:rPr lang="cs-CZ"/>
+              <a:t>Třetí úroveň</a:t>
+            </a:r>
+          </a:p>
+          <a:p>
+            <a:pPr lvl="3"/>
+            <a:r>
+              <a:rPr lang="cs-CZ"/>
+              <a:t>Čtvrtá úroveň</a:t>
+            </a:r>
+          </a:p>
+          <a:p>
+            <a:pPr lvl="4"/>
+            <a:r>
+              <a:rPr lang="cs-CZ"/>
+              <a:t>Pátá úroveň</a:t>
+            </a:r>
+          </a:p>
+        </p:txBody>
+      </p:sp>
+      <p:sp>
+        <p:nvSpPr>
+          <p:cNvPr id="6" name="Zástupný symbol pro zápatí 5"/>
+          <p:cNvSpPr>
+            <a:spLocks noGrp="1"/>
+          </p:cNvSpPr>
+          <p:nvPr>
+            <p:ph type="ftr" sz="quarter" idx="4"/>
+          </p:nvPr>
+        </p:nvSpPr>
+        <p:spPr>
+          <a:xfrm>
+            <a:off x="0" y="8685213"/>
+            <a:ext cx="2971800" cy="458787"/>
+          </a:xfrm>
+          <a:prstGeom prst="rect">
+            <a:avLst/>
+          </a:prstGeom>
+        </p:spPr>
+        <p:txBody>
+          <a:bodyPr vert="horz" lIns="91440" tIns="45720" rIns="91440" bIns="45720" rtlCol="0" anchor="b"/>
+          <a:lstStyle>
+            <a:lvl1pPr algn="l">
+              <a:defRPr sz="1200"/>
+            </a:lvl1pPr>
+          </a:lstStyle>
+          <a:p>
+            <a:endParaRPr lang="cs-CZ"/>
+          </a:p>
+        </p:txBody>
+      </p:sp>
+      <p:sp>
+        <p:nvSpPr>
+          <p:cNvPr id="7" name="Zástupný symbol pro číslo snímku 6"/>
+          <p:cNvSpPr>
+            <a:spLocks noGrp="1"/>
+          </p:cNvSpPr>
+          <p:nvPr>
+            <p:ph type="sldNum" sz="quarter" idx="5"/>
+          </p:nvPr>
+        </p:nvSpPr>
+        <p:spPr>
+          <a:xfrm>
+            <a:off x="3884613" y="8685213"/>
+            <a:ext cx="2971800" cy="458787"/>
+          </a:xfrm>
+          <a:prstGeom prst="rect">
+            <a:avLst/>
+          </a:prstGeom>
+        </p:spPr>
+        <p:txBody>
+          <a:bodyPr vert="horz" lIns="91440" tIns="45720" rIns="91440" bIns="45720" rtlCol="0" anchor="b"/>
+          <a:lstStyle>
+            <a:lvl1pPr algn="r">
+              <a:defRPr sz="1200"/>
+            </a:lvl1pPr>
+          </a:lstStyle>
+          <a:p>
+            <a:fld id="{6BF0E846-B7D2-4851-96C7-9D7D4BBE3099}" type="slidenum">
+              <a:rPr lang="cs-CZ" smtClean="0"/>
+              <a:t>‹#›</a:t>
+            </a:fld>
+            <a:endParaRPr lang="cs-CZ"/>
+          </a:p>
+        </p:txBody>
+      </p:sp>
+    </p:spTree>
+    <p:extLst>
+      <p:ext uri="{BB962C8B-B14F-4D97-AF65-F5344CB8AC3E}">
+        <p14:creationId xmlns:p14="http://schemas.microsoft.com/office/powerpoint/2010/main" val="588869633"/>
+      </p:ext>
+    </p:extLst>
+  </p:cSld>
+  <p:clrMap bg1="lt1" tx1="dk1" bg2="lt2" tx2="dk2" accent1="accent1" accent2="accent2" accent3="accent3" accent4="accent4" accent5="accent5" accent6="accent6" hlink="hlink" folHlink="folHlink"/>
+  <p:notesStyle>
+    <a:lvl1pPr marL="0" algn="l" defTabSz="914400" rtl="0" eaLnBrk="1" latinLnBrk="0" hangingPunct="1">
+      <a:defRPr sz="1200" kern="1200">
+        <a:solidFill>
+          <a:schemeClr val="tx1"/>
+        </a:solidFill>
+        <a:latin typeface="+mn-lt"/>
+        <a:ea typeface="+mn-ea"/>
+        <a:cs typeface="+mn-cs"/>
+      </a:defRPr>
+    </a:lvl1pPr>
+    <a:lvl2pPr marL="457200" algn="l" defTabSz="914400" rtl="0" eaLnBrk="1" latinLnBrk="0" hangingPunct="1">
+      <a:defRPr sz="1200" kern="1200">
+        <a:solidFill>
+          <a:schemeClr val="tx1"/>
+        </a:solidFill>
+        <a:latin typeface="+mn-lt"/>
+        <a:ea typeface="+mn-ea"/>
+        <a:cs typeface="+mn-cs"/>
+      </a:defRPr>
+    </a:lvl2pPr>
+    <a:lvl3pPr marL="914400" algn="l" defTabSz="914400" rtl="0" eaLnBrk="1" latinLnBrk="0" hangingPunct="1">
+      <a:defRPr sz="1200" kern="1200">
+        <a:solidFill>
+          <a:schemeClr val="tx1"/>
+        </a:solidFill>
+        <a:latin typeface="+mn-lt"/>
+        <a:ea typeface="+mn-ea"/>
+        <a:cs typeface="+mn-cs"/>
+      </a:defRPr>
+    </a:lvl3pPr>
+    <a:lvl4pPr marL="1371600" algn="l" defTabSz="914400" rtl="0" eaLnBrk="1" latinLnBrk="0" hangingPunct="1">
+      <a:defRPr sz="1200" kern="1200">
+        <a:solidFill>
+          <a:schemeClr val="tx1"/>
+        </a:solidFill>
+        <a:latin typeface="+mn-lt"/>
+        <a:ea typeface="+mn-ea"/>
+        <a:cs typeface="+mn-cs"/>
+      </a:defRPr>
+    </a:lvl4pPr>
+    <a:lvl5pPr marL="1828800" algn="l" defTabSz="914400" rtl="0" eaLnBrk="1" latinLnBrk="0" hangingPunct="1">
+      <a:defRPr sz="1200" kern="1200">
+        <a:solidFill>
+          <a:schemeClr val="tx1"/>
+        </a:solidFill>
+        <a:latin typeface="+mn-lt"/>
+        <a:ea typeface="+mn-ea"/>
+        <a:cs typeface="+mn-cs"/>
+      </a:defRPr>
+    </a:lvl5pPr>
+    <a:lvl6pPr marL="2286000" algn="l" defTabSz="914400" rtl="0" eaLnBrk="1" latinLnBrk="0" hangingPunct="1">
+      <a:defRPr sz="1200" kern="1200">
+        <a:solidFill>
+          <a:schemeClr val="tx1"/>
+        </a:solidFill>
+        <a:latin typeface="+mn-lt"/>
+        <a:ea typeface="+mn-ea"/>
+        <a:cs typeface="+mn-cs"/>
+      </a:defRPr>
+    </a:lvl6pPr>
+    <a:lvl7pPr marL="2743200" algn="l" defTabSz="914400" rtl="0" eaLnBrk="1" latinLnBrk="0" hangingPunct="1">
+      <a:defRPr sz="1200" kern="1200">
+        <a:solidFill>
+          <a:schemeClr val="tx1"/>
+        </a:solidFill>
+        <a:latin typeface="+mn-lt"/>
+        <a:ea typeface="+mn-ea"/>
+        <a:cs typeface="+mn-cs"/>
+      </a:defRPr>
+    </a:lvl7pPr>
+    <a:lvl8pPr marL="3200400" algn="l" defTabSz="914400" rtl="0" eaLnBrk="1" latinLnBrk="0" hangingPunct="1">
+      <a:defRPr sz="1200" kern="1200">
+        <a:solidFill>
+          <a:schemeClr val="tx1"/>
+        </a:solidFill>
+        <a:latin typeface="+mn-lt"/>
+        <a:ea typeface="+mn-ea"/>
+        <a:cs typeface="+mn-cs"/>
+      </a:defRPr>
+    </a:lvl8pPr>
+    <a:lvl9pPr marL="3657600" algn="l" defTabSz="914400" rtl="0" eaLnBrk="1" latinLnBrk="0" hangingPunct="1">
+      <a:defRPr sz="1200" kern="1200">
+        <a:solidFill>
+          <a:schemeClr val="tx1"/>
+        </a:solidFill>
+        <a:latin typeface="+mn-lt"/>
+        <a:ea typeface="+mn-ea"/>
+        <a:cs typeface="+mn-cs"/>
+      </a:defRPr>
+    </a:lvl9pPr>
+  </p:notesStyle>
+</p:notesMaster>
+</file>
+
+<file path=ppt/notesSlides/notesSlide1.xml><?xml version="1.0" encoding="utf-8"?>
+<p:notes xmlns:a="http://schemas.openxmlformats.org/drawingml/2006/main" xmlns:r="http://schemas.openxmlformats.org/officeDocument/2006/relationships" xmlns:p="http://schemas.openxmlformats.org/presentationml/2006/main">
+  <p:cSld>
+    <p:spTree>
+      <p:nvGrpSpPr>
+        <p:cNvPr id="1" name=""/>
+        <p:cNvGrpSpPr/>
+        <p:nvPr/>
+      </p:nvGrpSpPr>
+      <p:grpSpPr>
+        <a:xfrm>
+          <a:off x="0" y="0"/>
+          <a:ext cx="0" cy="0"/>
+          <a:chOff x="0" y="0"/>
+          <a:chExt cx="0" cy="0"/>
+        </a:xfrm>
+      </p:grpSpPr>
+      <p:sp>
+        <p:nvSpPr>
+          <p:cNvPr id="2" name="Zástupný symbol pro obrázek snímku 1"/>
+          <p:cNvSpPr>
+            <a:spLocks noGrp="1" noRot="1" noChangeAspect="1"/>
+          </p:cNvSpPr>
+          <p:nvPr>
+            <p:ph type="sldImg"/>
+          </p:nvPr>
+        </p:nvSpPr>
+        <p:spPr/>
+      </p:sp>
+      <p:sp>
+        <p:nvSpPr>
+          <p:cNvPr id="3" name="Zástupný symbol pro poznámky 2"/>
+          <p:cNvSpPr>
+            <a:spLocks noGrp="1"/>
+          </p:cNvSpPr>
+          <p:nvPr>
+            <p:ph type="body" idx="1"/>
+          </p:nvPr>
+        </p:nvSpPr>
+        <p:spPr/>
+        <p:txBody>
+          <a:bodyPr/>
+          <a:lstStyle/>
+          <a:p>
+            <a:r>
+              <a:rPr lang="cs-CZ" dirty="0"/>
+              <a:t>Top 40 000 </a:t>
+            </a:r>
+            <a:r>
+              <a:rPr lang="cs-CZ" dirty="0" err="1"/>
+              <a:t>subreddits</a:t>
+            </a:r>
+            <a:r>
+              <a:rPr lang="cs-CZ" dirty="0"/>
+              <a:t> in </a:t>
+            </a:r>
+            <a:r>
+              <a:rPr lang="cs-CZ" dirty="0" err="1"/>
+              <a:t>separate</a:t>
+            </a:r>
+            <a:r>
+              <a:rPr lang="cs-CZ" dirty="0"/>
+              <a:t> </a:t>
+            </a:r>
+            <a:r>
+              <a:rPr lang="cs-CZ" dirty="0" err="1"/>
+              <a:t>files</a:t>
+            </a:r>
+            <a:r>
+              <a:rPr lang="cs-CZ" dirty="0"/>
+              <a:t>. Data </a:t>
+            </a:r>
+            <a:r>
+              <a:rPr lang="cs-CZ" dirty="0" err="1"/>
+              <a:t>from</a:t>
+            </a:r>
+            <a:r>
+              <a:rPr lang="cs-CZ" dirty="0"/>
+              <a:t> </a:t>
+            </a:r>
+            <a:r>
+              <a:rPr lang="cs-CZ" dirty="0" err="1"/>
+              <a:t>june</a:t>
+            </a:r>
+            <a:r>
+              <a:rPr lang="cs-CZ" dirty="0"/>
+              <a:t> 2005 to </a:t>
+            </a:r>
+            <a:r>
+              <a:rPr lang="cs-CZ" dirty="0" err="1"/>
+              <a:t>december</a:t>
+            </a:r>
+            <a:r>
+              <a:rPr lang="cs-CZ" dirty="0"/>
+              <a:t> 2024</a:t>
+            </a:r>
+          </a:p>
+          <a:p>
+            <a:endParaRPr lang="cs-CZ" dirty="0"/>
+          </a:p>
+          <a:p>
+            <a:r>
+              <a:rPr lang="cs-CZ" dirty="0"/>
+              <a:t>r/</a:t>
+            </a:r>
+            <a:r>
+              <a:rPr lang="cs-CZ" dirty="0" err="1"/>
+              <a:t>freefolk</a:t>
+            </a:r>
+            <a:r>
+              <a:rPr lang="cs-CZ" dirty="0"/>
+              <a:t> = game </a:t>
+            </a:r>
+            <a:r>
+              <a:rPr lang="cs-CZ" dirty="0" err="1"/>
+              <a:t>of</a:t>
+            </a:r>
+            <a:r>
+              <a:rPr lang="cs-CZ" dirty="0"/>
+              <a:t> </a:t>
+            </a:r>
+            <a:r>
+              <a:rPr lang="cs-CZ" dirty="0" err="1"/>
+              <a:t>thrones</a:t>
+            </a:r>
+            <a:r>
+              <a:rPr lang="cs-CZ" dirty="0"/>
+              <a:t>, but more </a:t>
+            </a:r>
+            <a:r>
+              <a:rPr lang="cs-CZ" dirty="0" err="1"/>
+              <a:t>critical</a:t>
+            </a:r>
+            <a:r>
+              <a:rPr lang="cs-CZ" dirty="0"/>
+              <a:t>, </a:t>
+            </a:r>
+            <a:r>
+              <a:rPr lang="cs-CZ" dirty="0" err="1"/>
+              <a:t>memes</a:t>
+            </a:r>
+            <a:r>
+              <a:rPr lang="cs-CZ" dirty="0"/>
+              <a:t>, </a:t>
+            </a:r>
+            <a:r>
+              <a:rPr lang="cs-CZ" dirty="0" err="1"/>
+              <a:t>spoilers</a:t>
+            </a:r>
+            <a:r>
+              <a:rPr lang="cs-CZ" dirty="0"/>
+              <a:t>, </a:t>
+            </a:r>
+            <a:r>
+              <a:rPr lang="cs-CZ" dirty="0" err="1"/>
+              <a:t>kinda</a:t>
+            </a:r>
+            <a:r>
+              <a:rPr lang="cs-CZ" dirty="0"/>
+              <a:t> </a:t>
+            </a:r>
+            <a:r>
+              <a:rPr lang="cs-CZ" dirty="0" err="1"/>
+              <a:t>chaotic</a:t>
+            </a:r>
+            <a:endParaRPr lang="cs-CZ" dirty="0"/>
+          </a:p>
+          <a:p>
+            <a:r>
+              <a:rPr lang="cs-CZ" dirty="0"/>
+              <a:t>r/</a:t>
+            </a:r>
+            <a:r>
+              <a:rPr lang="cs-CZ" dirty="0" err="1"/>
+              <a:t>nbacircvlejerk</a:t>
+            </a:r>
+            <a:r>
+              <a:rPr lang="cs-CZ" dirty="0"/>
+              <a:t> = </a:t>
+            </a:r>
+            <a:r>
+              <a:rPr lang="cs-CZ" dirty="0" err="1"/>
+              <a:t>mocking</a:t>
+            </a:r>
+            <a:r>
+              <a:rPr lang="cs-CZ" dirty="0"/>
+              <a:t> </a:t>
+            </a:r>
+            <a:r>
+              <a:rPr lang="cs-CZ" dirty="0" err="1"/>
+              <a:t>nba</a:t>
+            </a:r>
+            <a:r>
+              <a:rPr lang="cs-CZ" dirty="0"/>
+              <a:t> </a:t>
+            </a:r>
+            <a:r>
+              <a:rPr lang="cs-CZ" dirty="0" err="1"/>
+              <a:t>fans</a:t>
+            </a:r>
+            <a:r>
+              <a:rPr lang="cs-CZ" dirty="0"/>
+              <a:t>, </a:t>
+            </a:r>
+            <a:r>
+              <a:rPr lang="cs-CZ" dirty="0" err="1"/>
+              <a:t>memes</a:t>
+            </a:r>
+            <a:r>
+              <a:rPr lang="cs-CZ" dirty="0"/>
+              <a:t>, </a:t>
+            </a:r>
+            <a:r>
+              <a:rPr lang="cs-CZ" dirty="0" err="1"/>
+              <a:t>satire</a:t>
+            </a:r>
+            <a:r>
+              <a:rPr lang="cs-CZ" dirty="0"/>
+              <a:t>/irony</a:t>
+            </a:r>
+          </a:p>
+          <a:p>
+            <a:r>
+              <a:rPr lang="cs-CZ" dirty="0" err="1"/>
+              <a:t>Aww</a:t>
+            </a:r>
+            <a:r>
+              <a:rPr lang="cs-CZ" dirty="0"/>
+              <a:t> = </a:t>
+            </a:r>
+            <a:r>
+              <a:rPr lang="cs-CZ" dirty="0" err="1"/>
+              <a:t>wholesome</a:t>
+            </a:r>
+            <a:r>
+              <a:rPr lang="cs-CZ" dirty="0"/>
+              <a:t> </a:t>
+            </a:r>
+            <a:r>
+              <a:rPr lang="cs-CZ" dirty="0" err="1"/>
+              <a:t>content</a:t>
+            </a:r>
+            <a:endParaRPr lang="cs-CZ" dirty="0"/>
+          </a:p>
+          <a:p>
+            <a:endParaRPr lang="cs-CZ" dirty="0"/>
+          </a:p>
+          <a:p>
+            <a:endParaRPr lang="cs-CZ" dirty="0"/>
+          </a:p>
+          <a:p>
+            <a:endParaRPr lang="cs-CZ" dirty="0"/>
+          </a:p>
+        </p:txBody>
+      </p:sp>
+      <p:sp>
+        <p:nvSpPr>
+          <p:cNvPr id="4" name="Zástupný symbol pro číslo snímku 3"/>
+          <p:cNvSpPr>
+            <a:spLocks noGrp="1"/>
+          </p:cNvSpPr>
+          <p:nvPr>
+            <p:ph type="sldNum" sz="quarter" idx="5"/>
+          </p:nvPr>
+        </p:nvSpPr>
+        <p:spPr/>
+        <p:txBody>
+          <a:bodyPr/>
+          <a:lstStyle/>
+          <a:p>
+            <a:fld id="{6BF0E846-B7D2-4851-96C7-9D7D4BBE3099}" type="slidenum">
+              <a:rPr lang="cs-CZ" smtClean="0"/>
+              <a:t>3</a:t>
+            </a:fld>
+            <a:endParaRPr lang="cs-CZ"/>
+          </a:p>
+        </p:txBody>
+      </p:sp>
+    </p:spTree>
+    <p:extLst>
+      <p:ext uri="{BB962C8B-B14F-4D97-AF65-F5344CB8AC3E}">
+        <p14:creationId xmlns:p14="http://schemas.microsoft.com/office/powerpoint/2010/main" val="2832689914"/>
+      </p:ext>
+    </p:extLst>
+  </p:cSld>
+  <p:clrMapOvr>
+    <a:masterClrMapping/>
+  </p:clrMapOvr>
+</p:notes>
+</file>
+
+<file path=ppt/notesSlides/notesSlide2.xml><?xml version="1.0" encoding="utf-8"?>
+<p:notes xmlns:a="http://schemas.openxmlformats.org/drawingml/2006/main" xmlns:r="http://schemas.openxmlformats.org/officeDocument/2006/relationships" xmlns:p="http://schemas.openxmlformats.org/presentationml/2006/main">
+  <p:cSld>
+    <p:spTree>
+      <p:nvGrpSpPr>
+        <p:cNvPr id="1" name=""/>
+        <p:cNvGrpSpPr/>
+        <p:nvPr/>
+      </p:nvGrpSpPr>
+      <p:grpSpPr>
+        <a:xfrm>
+          <a:off x="0" y="0"/>
+          <a:ext cx="0" cy="0"/>
+          <a:chOff x="0" y="0"/>
+          <a:chExt cx="0" cy="0"/>
+        </a:xfrm>
+      </p:grpSpPr>
+      <p:sp>
+        <p:nvSpPr>
+          <p:cNvPr id="2" name="Zástupný symbol pro obrázek snímku 1"/>
+          <p:cNvSpPr>
+            <a:spLocks noGrp="1" noRot="1" noChangeAspect="1"/>
+          </p:cNvSpPr>
+          <p:nvPr>
+            <p:ph type="sldImg"/>
+          </p:nvPr>
+        </p:nvSpPr>
+        <p:spPr/>
+      </p:sp>
+      <p:sp>
+        <p:nvSpPr>
+          <p:cNvPr id="3" name="Zástupný symbol pro poznámky 2"/>
+          <p:cNvSpPr>
+            <a:spLocks noGrp="1"/>
+          </p:cNvSpPr>
+          <p:nvPr>
+            <p:ph type="body" idx="1"/>
+          </p:nvPr>
+        </p:nvSpPr>
+        <p:spPr/>
+        <p:txBody>
+          <a:bodyPr/>
+          <a:lstStyle/>
+          <a:p>
+            <a:r>
+              <a:rPr lang="cs-CZ" dirty="0" err="1"/>
+              <a:t>April</a:t>
+            </a:r>
+            <a:r>
+              <a:rPr lang="cs-CZ" dirty="0"/>
+              <a:t> 2011 – August 2024 -&gt; 4643 </a:t>
+            </a:r>
+            <a:r>
+              <a:rPr lang="cs-CZ" dirty="0" err="1"/>
+              <a:t>days</a:t>
+            </a:r>
+            <a:endParaRPr lang="cs-CZ" dirty="0"/>
+          </a:p>
+        </p:txBody>
+      </p:sp>
+      <p:sp>
+        <p:nvSpPr>
+          <p:cNvPr id="4" name="Zástupný symbol pro číslo snímku 3"/>
+          <p:cNvSpPr>
+            <a:spLocks noGrp="1"/>
+          </p:cNvSpPr>
+          <p:nvPr>
+            <p:ph type="sldNum" sz="quarter" idx="5"/>
+          </p:nvPr>
+        </p:nvSpPr>
+        <p:spPr/>
+        <p:txBody>
+          <a:bodyPr/>
+          <a:lstStyle/>
+          <a:p>
+            <a:fld id="{6BF0E846-B7D2-4851-96C7-9D7D4BBE3099}" type="slidenum">
+              <a:rPr lang="cs-CZ" smtClean="0"/>
+              <a:t>5</a:t>
+            </a:fld>
+            <a:endParaRPr lang="cs-CZ"/>
+          </a:p>
+        </p:txBody>
+      </p:sp>
+    </p:spTree>
+    <p:extLst>
+      <p:ext uri="{BB962C8B-B14F-4D97-AF65-F5344CB8AC3E}">
+        <p14:creationId xmlns:p14="http://schemas.microsoft.com/office/powerpoint/2010/main" val="1557731601"/>
+      </p:ext>
+    </p:extLst>
+  </p:cSld>
+  <p:clrMapOvr>
+    <a:masterClrMapping/>
+  </p:clrMapOvr>
+</p:notes>
+</file>
+
+<file path=ppt/notesSlides/notesSlide3.xml><?xml version="1.0" encoding="utf-8"?>
+<p:notes xmlns:a="http://schemas.openxmlformats.org/drawingml/2006/main" xmlns:r="http://schemas.openxmlformats.org/officeDocument/2006/relationships" xmlns:p="http://schemas.openxmlformats.org/presentationml/2006/main">
+  <p:cSld>
+    <p:spTree>
+      <p:nvGrpSpPr>
+        <p:cNvPr id="1" name=""/>
+        <p:cNvGrpSpPr/>
+        <p:nvPr/>
+      </p:nvGrpSpPr>
+      <p:grpSpPr>
+        <a:xfrm>
+          <a:off x="0" y="0"/>
+          <a:ext cx="0" cy="0"/>
+          <a:chOff x="0" y="0"/>
+          <a:chExt cx="0" cy="0"/>
+        </a:xfrm>
+      </p:grpSpPr>
+      <p:sp>
+        <p:nvSpPr>
+          <p:cNvPr id="2" name="Zástupný symbol pro obrázek snímku 1"/>
+          <p:cNvSpPr>
+            <a:spLocks noGrp="1" noRot="1" noChangeAspect="1"/>
+          </p:cNvSpPr>
+          <p:nvPr>
+            <p:ph type="sldImg"/>
+          </p:nvPr>
+        </p:nvSpPr>
+        <p:spPr/>
+      </p:sp>
+      <p:sp>
+        <p:nvSpPr>
+          <p:cNvPr id="3" name="Zástupný symbol pro poznámky 2"/>
+          <p:cNvSpPr>
+            <a:spLocks noGrp="1"/>
+          </p:cNvSpPr>
+          <p:nvPr>
+            <p:ph type="body" idx="1"/>
+          </p:nvPr>
+        </p:nvSpPr>
+        <p:spPr/>
+        <p:txBody>
+          <a:bodyPr/>
+          <a:lstStyle/>
+          <a:p>
+            <a:r>
+              <a:rPr lang="cs-CZ" dirty="0" err="1"/>
+              <a:t>Cumulative</a:t>
+            </a:r>
+            <a:r>
+              <a:rPr lang="cs-CZ" dirty="0"/>
+              <a:t> </a:t>
+            </a:r>
+            <a:r>
+              <a:rPr lang="cs-CZ" dirty="0" err="1"/>
+              <a:t>scores</a:t>
+            </a:r>
+            <a:r>
+              <a:rPr lang="cs-CZ" dirty="0"/>
+              <a:t> </a:t>
+            </a:r>
+          </a:p>
+        </p:txBody>
+      </p:sp>
+      <p:sp>
+        <p:nvSpPr>
+          <p:cNvPr id="4" name="Zástupný symbol pro číslo snímku 3"/>
+          <p:cNvSpPr>
+            <a:spLocks noGrp="1"/>
+          </p:cNvSpPr>
+          <p:nvPr>
+            <p:ph type="sldNum" sz="quarter" idx="5"/>
+          </p:nvPr>
+        </p:nvSpPr>
+        <p:spPr/>
+        <p:txBody>
+          <a:bodyPr/>
+          <a:lstStyle/>
+          <a:p>
+            <a:fld id="{6BF0E846-B7D2-4851-96C7-9D7D4BBE3099}" type="slidenum">
+              <a:rPr lang="cs-CZ" smtClean="0"/>
+              <a:t>6</a:t>
+            </a:fld>
+            <a:endParaRPr lang="cs-CZ"/>
+          </a:p>
+        </p:txBody>
+      </p:sp>
+    </p:spTree>
+    <p:extLst>
+      <p:ext uri="{BB962C8B-B14F-4D97-AF65-F5344CB8AC3E}">
+        <p14:creationId xmlns:p14="http://schemas.microsoft.com/office/powerpoint/2010/main" val="2171648790"/>
+      </p:ext>
+    </p:extLst>
+  </p:cSld>
+  <p:clrMapOvr>
+    <a:masterClrMapping/>
+  </p:clrMapOvr>
+</p:notes>
+</file>
+
+<file path=ppt/notesSlides/notesSlide4.xml><?xml version="1.0" encoding="utf-8"?>
+<p:notes xmlns:a="http://schemas.openxmlformats.org/drawingml/2006/main" xmlns:r="http://schemas.openxmlformats.org/officeDocument/2006/relationships" xmlns:p="http://schemas.openxmlformats.org/presentationml/2006/main">
+  <p:cSld>
+    <p:spTree>
+      <p:nvGrpSpPr>
+        <p:cNvPr id="1" name=""/>
+        <p:cNvGrpSpPr/>
+        <p:nvPr/>
+      </p:nvGrpSpPr>
+      <p:grpSpPr>
+        <a:xfrm>
+          <a:off x="0" y="0"/>
+          <a:ext cx="0" cy="0"/>
+          <a:chOff x="0" y="0"/>
+          <a:chExt cx="0" cy="0"/>
+        </a:xfrm>
+      </p:grpSpPr>
+      <p:sp>
+        <p:nvSpPr>
+          <p:cNvPr id="2" name="Zástupný symbol pro obrázek snímku 1"/>
+          <p:cNvSpPr>
+            <a:spLocks noGrp="1" noRot="1" noChangeAspect="1"/>
+          </p:cNvSpPr>
+          <p:nvPr>
+            <p:ph type="sldImg"/>
+          </p:nvPr>
+        </p:nvSpPr>
+        <p:spPr/>
+      </p:sp>
+      <p:sp>
+        <p:nvSpPr>
+          <p:cNvPr id="3" name="Zástupný symbol pro poznámky 2"/>
+          <p:cNvSpPr>
+            <a:spLocks noGrp="1"/>
+          </p:cNvSpPr>
+          <p:nvPr>
+            <p:ph type="body" idx="1"/>
+          </p:nvPr>
+        </p:nvSpPr>
+        <p:spPr/>
+        <p:txBody>
+          <a:bodyPr/>
+          <a:lstStyle/>
+          <a:p>
+            <a:r>
+              <a:rPr lang="cs-CZ" dirty="0" err="1"/>
+              <a:t>Tried</a:t>
+            </a:r>
+            <a:r>
+              <a:rPr lang="cs-CZ" dirty="0"/>
+              <a:t> to use </a:t>
+            </a:r>
+            <a:r>
+              <a:rPr lang="cs-CZ" dirty="0" err="1"/>
+              <a:t>sth</a:t>
+            </a:r>
+            <a:r>
+              <a:rPr lang="cs-CZ" dirty="0"/>
+              <a:t> </a:t>
+            </a:r>
+            <a:r>
+              <a:rPr lang="cs-CZ" dirty="0" err="1"/>
+              <a:t>with</a:t>
+            </a:r>
+            <a:r>
+              <a:rPr lang="cs-CZ" dirty="0"/>
+              <a:t> </a:t>
+            </a:r>
+            <a:r>
+              <a:rPr lang="cs-CZ" dirty="0" err="1"/>
+              <a:t>higher</a:t>
+            </a:r>
+            <a:r>
+              <a:rPr lang="cs-CZ" dirty="0"/>
+              <a:t> </a:t>
+            </a:r>
+            <a:r>
+              <a:rPr lang="cs-CZ" dirty="0" err="1"/>
+              <a:t>scores</a:t>
+            </a:r>
+            <a:r>
+              <a:rPr lang="cs-CZ" dirty="0"/>
+              <a:t> – </a:t>
+            </a:r>
+            <a:r>
+              <a:rPr lang="cs-CZ" dirty="0" err="1"/>
+              <a:t>fail</a:t>
+            </a:r>
+            <a:r>
+              <a:rPr lang="cs-CZ" dirty="0"/>
+              <a:t> </a:t>
+            </a:r>
+            <a:r>
+              <a:rPr lang="cs-CZ" dirty="0" err="1"/>
+              <a:t>apparently</a:t>
+            </a:r>
+            <a:endParaRPr lang="cs-CZ" dirty="0"/>
+          </a:p>
+        </p:txBody>
+      </p:sp>
+      <p:sp>
+        <p:nvSpPr>
+          <p:cNvPr id="4" name="Zástupný symbol pro číslo snímku 3"/>
+          <p:cNvSpPr>
+            <a:spLocks noGrp="1"/>
+          </p:cNvSpPr>
+          <p:nvPr>
+            <p:ph type="sldNum" sz="quarter" idx="5"/>
+          </p:nvPr>
+        </p:nvSpPr>
+        <p:spPr/>
+        <p:txBody>
+          <a:bodyPr/>
+          <a:lstStyle/>
+          <a:p>
+            <a:fld id="{6BF0E846-B7D2-4851-96C7-9D7D4BBE3099}" type="slidenum">
+              <a:rPr lang="cs-CZ" smtClean="0"/>
+              <a:t>8</a:t>
+            </a:fld>
+            <a:endParaRPr lang="cs-CZ"/>
+          </a:p>
+        </p:txBody>
+      </p:sp>
+    </p:spTree>
+    <p:extLst>
+      <p:ext uri="{BB962C8B-B14F-4D97-AF65-F5344CB8AC3E}">
+        <p14:creationId xmlns:p14="http://schemas.microsoft.com/office/powerpoint/2010/main" val="1546617580"/>
+      </p:ext>
+    </p:extLst>
+  </p:cSld>
+  <p:clrMapOvr>
+    <a:masterClrMapping/>
+  </p:clrMapOvr>
+</p:notes>
+</file>
+
+<file path=ppt/notesSlides/notesSlide5.xml><?xml version="1.0" encoding="utf-8"?>
+<p:notes xmlns:a="http://schemas.openxmlformats.org/drawingml/2006/main" xmlns:r="http://schemas.openxmlformats.org/officeDocument/2006/relationships" xmlns:p="http://schemas.openxmlformats.org/presentationml/2006/main">
+  <p:cSld>
+    <p:spTree>
+      <p:nvGrpSpPr>
+        <p:cNvPr id="1" name=""/>
+        <p:cNvGrpSpPr/>
+        <p:nvPr/>
+      </p:nvGrpSpPr>
+      <p:grpSpPr>
+        <a:xfrm>
+          <a:off x="0" y="0"/>
+          <a:ext cx="0" cy="0"/>
+          <a:chOff x="0" y="0"/>
+          <a:chExt cx="0" cy="0"/>
+        </a:xfrm>
+      </p:grpSpPr>
+      <p:sp>
+        <p:nvSpPr>
+          <p:cNvPr id="2" name="Zástupný symbol pro obrázek snímku 1"/>
+          <p:cNvSpPr>
+            <a:spLocks noGrp="1" noRot="1" noChangeAspect="1"/>
+          </p:cNvSpPr>
+          <p:nvPr>
+            <p:ph type="sldImg"/>
+          </p:nvPr>
+        </p:nvSpPr>
+        <p:spPr/>
+      </p:sp>
+      <p:sp>
+        <p:nvSpPr>
+          <p:cNvPr id="3" name="Zástupný symbol pro poznámky 2"/>
+          <p:cNvSpPr>
+            <a:spLocks noGrp="1"/>
+          </p:cNvSpPr>
+          <p:nvPr>
+            <p:ph type="body" idx="1"/>
+          </p:nvPr>
+        </p:nvSpPr>
+        <p:spPr/>
+        <p:txBody>
+          <a:bodyPr/>
+          <a:lstStyle/>
+          <a:p>
+            <a:r>
+              <a:rPr lang="cs-CZ" dirty="0"/>
+              <a:t>Hodně tematicky úzký </a:t>
+            </a:r>
+            <a:r>
+              <a:rPr lang="cs-CZ" dirty="0" err="1"/>
+              <a:t>subreddit</a:t>
+            </a:r>
+            <a:r>
+              <a:rPr lang="cs-CZ" dirty="0"/>
+              <a:t>=překryv clusterů</a:t>
+            </a:r>
+          </a:p>
+          <a:p>
+            <a:r>
+              <a:rPr lang="cs-CZ" dirty="0"/>
+              <a:t>Oddělenější clustery obsahující spoilery (</a:t>
+            </a:r>
+            <a:r>
+              <a:rPr lang="cs-CZ" dirty="0" err="1"/>
+              <a:t>red</a:t>
+            </a:r>
+            <a:r>
+              <a:rPr lang="cs-CZ" dirty="0"/>
+              <a:t>, </a:t>
+            </a:r>
+            <a:r>
+              <a:rPr lang="cs-CZ" dirty="0" err="1"/>
+              <a:t>orange</a:t>
+            </a:r>
+            <a:r>
+              <a:rPr lang="cs-CZ" dirty="0"/>
+              <a:t>, </a:t>
+            </a:r>
+            <a:r>
+              <a:rPr lang="cs-CZ" dirty="0" err="1"/>
+              <a:t>purple</a:t>
+            </a:r>
+            <a:r>
+              <a:rPr lang="cs-CZ" dirty="0"/>
+              <a:t>)</a:t>
+            </a:r>
+          </a:p>
+        </p:txBody>
+      </p:sp>
+      <p:sp>
+        <p:nvSpPr>
+          <p:cNvPr id="4" name="Zástupný symbol pro číslo snímku 3"/>
+          <p:cNvSpPr>
+            <a:spLocks noGrp="1"/>
+          </p:cNvSpPr>
+          <p:nvPr>
+            <p:ph type="sldNum" sz="quarter" idx="5"/>
+          </p:nvPr>
+        </p:nvSpPr>
+        <p:spPr/>
+        <p:txBody>
+          <a:bodyPr/>
+          <a:lstStyle/>
+          <a:p>
+            <a:fld id="{6BF0E846-B7D2-4851-96C7-9D7D4BBE3099}" type="slidenum">
+              <a:rPr lang="cs-CZ" smtClean="0"/>
+              <a:t>9</a:t>
+            </a:fld>
+            <a:endParaRPr lang="cs-CZ"/>
+          </a:p>
+        </p:txBody>
+      </p:sp>
+    </p:spTree>
+    <p:extLst>
+      <p:ext uri="{BB962C8B-B14F-4D97-AF65-F5344CB8AC3E}">
+        <p14:creationId xmlns:p14="http://schemas.microsoft.com/office/powerpoint/2010/main" val="3414375077"/>
+      </p:ext>
+    </p:extLst>
+  </p:cSld>
+  <p:clrMapOvr>
+    <a:masterClrMapping/>
+  </p:clrMapOvr>
+</p:notes>
+</file>
+
+<file path=ppt/notesSlides/notesSlide6.xml><?xml version="1.0" encoding="utf-8"?>
+<p:notes xmlns:a="http://schemas.openxmlformats.org/drawingml/2006/main" xmlns:r="http://schemas.openxmlformats.org/officeDocument/2006/relationships" xmlns:p="http://schemas.openxmlformats.org/presentationml/2006/main">
+  <p:cSld>
+    <p:spTree>
+      <p:nvGrpSpPr>
+        <p:cNvPr id="1" name=""/>
+        <p:cNvGrpSpPr/>
+        <p:nvPr/>
+      </p:nvGrpSpPr>
+      <p:grpSpPr>
+        <a:xfrm>
+          <a:off x="0" y="0"/>
+          <a:ext cx="0" cy="0"/>
+          <a:chOff x="0" y="0"/>
+          <a:chExt cx="0" cy="0"/>
+        </a:xfrm>
+      </p:grpSpPr>
+      <p:sp>
+        <p:nvSpPr>
+          <p:cNvPr id="2" name="Zástupný symbol pro obrázek snímku 1"/>
+          <p:cNvSpPr>
+            <a:spLocks noGrp="1" noRot="1" noChangeAspect="1"/>
+          </p:cNvSpPr>
+          <p:nvPr>
+            <p:ph type="sldImg"/>
+          </p:nvPr>
+        </p:nvSpPr>
+        <p:spPr/>
+      </p:sp>
+      <p:sp>
+        <p:nvSpPr>
+          <p:cNvPr id="3" name="Zástupný symbol pro poznámky 2"/>
+          <p:cNvSpPr>
+            <a:spLocks noGrp="1"/>
+          </p:cNvSpPr>
+          <p:nvPr>
+            <p:ph type="body" idx="1"/>
+          </p:nvPr>
+        </p:nvSpPr>
+        <p:spPr/>
+        <p:txBody>
+          <a:bodyPr/>
+          <a:lstStyle/>
+          <a:p>
+            <a:r>
+              <a:rPr lang="cs-CZ" dirty="0" err="1"/>
+              <a:t>Users</a:t>
+            </a:r>
+            <a:r>
+              <a:rPr lang="cs-CZ" dirty="0"/>
+              <a:t>, </a:t>
+            </a:r>
+            <a:r>
+              <a:rPr lang="cs-CZ" dirty="0" err="1"/>
+              <a:t>size</a:t>
+            </a:r>
+            <a:r>
+              <a:rPr lang="cs-CZ" dirty="0"/>
+              <a:t>=</a:t>
+            </a:r>
+            <a:r>
+              <a:rPr lang="cs-CZ" dirty="0" err="1"/>
+              <a:t>activity</a:t>
+            </a:r>
+            <a:r>
+              <a:rPr lang="cs-CZ" dirty="0"/>
+              <a:t> = minimum comment </a:t>
+            </a:r>
+            <a:r>
+              <a:rPr lang="cs-CZ" dirty="0" err="1"/>
+              <a:t>count</a:t>
+            </a:r>
+            <a:r>
+              <a:rPr lang="cs-CZ" dirty="0"/>
+              <a:t> </a:t>
+            </a:r>
+            <a:r>
+              <a:rPr lang="cs-CZ" dirty="0" err="1"/>
+              <a:t>across</a:t>
+            </a:r>
+            <a:r>
+              <a:rPr lang="cs-CZ" dirty="0"/>
+              <a:t> </a:t>
+            </a:r>
+            <a:r>
+              <a:rPr lang="cs-CZ" dirty="0" err="1"/>
+              <a:t>both</a:t>
+            </a:r>
+            <a:r>
+              <a:rPr lang="cs-CZ" dirty="0"/>
+              <a:t> </a:t>
+            </a:r>
+            <a:r>
+              <a:rPr lang="cs-CZ" dirty="0" err="1"/>
+              <a:t>boards</a:t>
+            </a:r>
+            <a:endParaRPr lang="cs-CZ" dirty="0"/>
+          </a:p>
+        </p:txBody>
+      </p:sp>
+      <p:sp>
+        <p:nvSpPr>
+          <p:cNvPr id="4" name="Zástupný symbol pro číslo snímku 3"/>
+          <p:cNvSpPr>
+            <a:spLocks noGrp="1"/>
+          </p:cNvSpPr>
+          <p:nvPr>
+            <p:ph type="sldNum" sz="quarter" idx="5"/>
+          </p:nvPr>
+        </p:nvSpPr>
+        <p:spPr/>
+        <p:txBody>
+          <a:bodyPr/>
+          <a:lstStyle/>
+          <a:p>
+            <a:fld id="{6BF0E846-B7D2-4851-96C7-9D7D4BBE3099}" type="slidenum">
+              <a:rPr lang="cs-CZ" smtClean="0"/>
+              <a:t>10</a:t>
+            </a:fld>
+            <a:endParaRPr lang="cs-CZ"/>
+          </a:p>
+        </p:txBody>
+      </p:sp>
+    </p:spTree>
+    <p:extLst>
+      <p:ext uri="{BB962C8B-B14F-4D97-AF65-F5344CB8AC3E}">
+        <p14:creationId xmlns:p14="http://schemas.microsoft.com/office/powerpoint/2010/main" val="1265793034"/>
+      </p:ext>
+    </p:extLst>
+  </p:cSld>
+  <p:clrMapOvr>
+    <a:masterClrMapping/>
+  </p:clrMapOvr>
+</p:notes>
+</file>
+
+<file path=ppt/notesSlides/notesSlide7.xml><?xml version="1.0" encoding="utf-8"?>
+<p:notes xmlns:a="http://schemas.openxmlformats.org/drawingml/2006/main" xmlns:r="http://schemas.openxmlformats.org/officeDocument/2006/relationships" xmlns:p="http://schemas.openxmlformats.org/presentationml/2006/main">
+  <p:cSld>
+    <p:spTree>
+      <p:nvGrpSpPr>
+        <p:cNvPr id="1" name=""/>
+        <p:cNvGrpSpPr/>
+        <p:nvPr/>
+      </p:nvGrpSpPr>
+      <p:grpSpPr>
+        <a:xfrm>
+          <a:off x="0" y="0"/>
+          <a:ext cx="0" cy="0"/>
+          <a:chOff x="0" y="0"/>
+          <a:chExt cx="0" cy="0"/>
+        </a:xfrm>
+      </p:grpSpPr>
+      <p:sp>
+        <p:nvSpPr>
+          <p:cNvPr id="2" name="Zástupný symbol pro obrázek snímku 1"/>
+          <p:cNvSpPr>
+            <a:spLocks noGrp="1" noRot="1" noChangeAspect="1"/>
+          </p:cNvSpPr>
+          <p:nvPr>
+            <p:ph type="sldImg"/>
+          </p:nvPr>
+        </p:nvSpPr>
+        <p:spPr/>
+      </p:sp>
+      <p:sp>
+        <p:nvSpPr>
+          <p:cNvPr id="3" name="Zástupný symbol pro poznámky 2"/>
+          <p:cNvSpPr>
+            <a:spLocks noGrp="1"/>
+          </p:cNvSpPr>
+          <p:nvPr>
+            <p:ph type="body" idx="1"/>
+          </p:nvPr>
+        </p:nvSpPr>
+        <p:spPr/>
+        <p:txBody>
+          <a:bodyPr/>
+          <a:lstStyle/>
+          <a:p>
+            <a:r>
+              <a:rPr lang="cs-CZ" dirty="0" err="1"/>
+              <a:t>Size</a:t>
+            </a:r>
+            <a:r>
+              <a:rPr lang="cs-CZ" dirty="0"/>
+              <a:t> = comment </a:t>
+            </a:r>
+            <a:r>
+              <a:rPr lang="cs-CZ" dirty="0" err="1"/>
+              <a:t>count</a:t>
+            </a:r>
+            <a:endParaRPr lang="cs-CZ" dirty="0"/>
+          </a:p>
+        </p:txBody>
+      </p:sp>
+      <p:sp>
+        <p:nvSpPr>
+          <p:cNvPr id="4" name="Zástupný symbol pro číslo snímku 3"/>
+          <p:cNvSpPr>
+            <a:spLocks noGrp="1"/>
+          </p:cNvSpPr>
+          <p:nvPr>
+            <p:ph type="sldNum" sz="quarter" idx="5"/>
+          </p:nvPr>
+        </p:nvSpPr>
+        <p:spPr/>
+        <p:txBody>
+          <a:bodyPr/>
+          <a:lstStyle/>
+          <a:p>
+            <a:fld id="{6BF0E846-B7D2-4851-96C7-9D7D4BBE3099}" type="slidenum">
+              <a:rPr lang="cs-CZ" smtClean="0"/>
+              <a:t>11</a:t>
+            </a:fld>
+            <a:endParaRPr lang="cs-CZ"/>
+          </a:p>
+        </p:txBody>
+      </p:sp>
+    </p:spTree>
+    <p:extLst>
+      <p:ext uri="{BB962C8B-B14F-4D97-AF65-F5344CB8AC3E}">
+        <p14:creationId xmlns:p14="http://schemas.microsoft.com/office/powerpoint/2010/main" val="3944802014"/>
+      </p:ext>
+    </p:extLst>
+  </p:cSld>
+  <p:clrMapOvr>
+    <a:masterClrMapping/>
+  </p:clrMapOvr>
+</p:notes>
+</file>
+
 <file path=ppt/slideLayouts/slideLayout1.xml><?xml version="1.0" encoding="utf-8"?>
 <p:sldLayout xmlns:a="http://schemas.openxmlformats.org/drawingml/2006/main" xmlns:r="http://schemas.openxmlformats.org/officeDocument/2006/relationships" xmlns:p="http://schemas.openxmlformats.org/presentationml/2006/main" type="title" preserve="1">
   <p:cSld name="Úvodní snímek">
@@ -271,7 +1602,7 @@
           <a:p>
             <a:fld id="{5CF6437A-2C7A-4D90-8889-FD5FDE1B78D3}" type="datetimeFigureOut">
               <a:rPr lang="cs-CZ" smtClean="0"/>
-              <a:t>05.12.2025</a:t>
+              <a:t>07.01.2026</a:t>
             </a:fld>
             <a:endParaRPr lang="cs-CZ"/>
           </a:p>
@@ -469,7 +1800,7 @@
           <a:p>
             <a:fld id="{5CF6437A-2C7A-4D90-8889-FD5FDE1B78D3}" type="datetimeFigureOut">
               <a:rPr lang="cs-CZ" smtClean="0"/>
-              <a:t>05.12.2025</a:t>
+              <a:t>07.01.2026</a:t>
             </a:fld>
             <a:endParaRPr lang="cs-CZ"/>
           </a:p>
@@ -677,7 +2008,7 @@
           <a:p>
             <a:fld id="{5CF6437A-2C7A-4D90-8889-FD5FDE1B78D3}" type="datetimeFigureOut">
               <a:rPr lang="cs-CZ" smtClean="0"/>
-              <a:t>05.12.2025</a:t>
+              <a:t>07.01.2026</a:t>
             </a:fld>
             <a:endParaRPr lang="cs-CZ"/>
           </a:p>
@@ -875,7 +2206,7 @@
           <a:p>
             <a:fld id="{5CF6437A-2C7A-4D90-8889-FD5FDE1B78D3}" type="datetimeFigureOut">
               <a:rPr lang="cs-CZ" smtClean="0"/>
-              <a:t>05.12.2025</a:t>
+              <a:t>07.01.2026</a:t>
             </a:fld>
             <a:endParaRPr lang="cs-CZ"/>
           </a:p>
@@ -1150,7 +2481,7 @@
           <a:p>
             <a:fld id="{5CF6437A-2C7A-4D90-8889-FD5FDE1B78D3}" type="datetimeFigureOut">
               <a:rPr lang="cs-CZ" smtClean="0"/>
-              <a:t>05.12.2025</a:t>
+              <a:t>07.01.2026</a:t>
             </a:fld>
             <a:endParaRPr lang="cs-CZ"/>
           </a:p>
@@ -1415,7 +2746,7 @@
           <a:p>
             <a:fld id="{5CF6437A-2C7A-4D90-8889-FD5FDE1B78D3}" type="datetimeFigureOut">
               <a:rPr lang="cs-CZ" smtClean="0"/>
-              <a:t>05.12.2025</a:t>
+              <a:t>07.01.2026</a:t>
             </a:fld>
             <a:endParaRPr lang="cs-CZ"/>
           </a:p>
@@ -1827,7 +3158,7 @@
           <a:p>
             <a:fld id="{5CF6437A-2C7A-4D90-8889-FD5FDE1B78D3}" type="datetimeFigureOut">
               <a:rPr lang="cs-CZ" smtClean="0"/>
-              <a:t>05.12.2025</a:t>
+              <a:t>07.01.2026</a:t>
             </a:fld>
             <a:endParaRPr lang="cs-CZ"/>
           </a:p>
@@ -1968,7 +3299,7 @@
           <a:p>
             <a:fld id="{5CF6437A-2C7A-4D90-8889-FD5FDE1B78D3}" type="datetimeFigureOut">
               <a:rPr lang="cs-CZ" smtClean="0"/>
-              <a:t>05.12.2025</a:t>
+              <a:t>07.01.2026</a:t>
             </a:fld>
             <a:endParaRPr lang="cs-CZ"/>
           </a:p>
@@ -2081,7 +3412,7 @@
           <a:p>
             <a:fld id="{5CF6437A-2C7A-4D90-8889-FD5FDE1B78D3}" type="datetimeFigureOut">
               <a:rPr lang="cs-CZ" smtClean="0"/>
-              <a:t>05.12.2025</a:t>
+              <a:t>07.01.2026</a:t>
             </a:fld>
             <a:endParaRPr lang="cs-CZ"/>
           </a:p>
@@ -2392,7 +3723,7 @@
           <a:p>
             <a:fld id="{5CF6437A-2C7A-4D90-8889-FD5FDE1B78D3}" type="datetimeFigureOut">
               <a:rPr lang="cs-CZ" smtClean="0"/>
-              <a:t>05.12.2025</a:t>
+              <a:t>07.01.2026</a:t>
             </a:fld>
             <a:endParaRPr lang="cs-CZ"/>
           </a:p>
@@ -2680,7 +4011,7 @@
           <a:p>
             <a:fld id="{5CF6437A-2C7A-4D90-8889-FD5FDE1B78D3}" type="datetimeFigureOut">
               <a:rPr lang="cs-CZ" smtClean="0"/>
-              <a:t>05.12.2025</a:t>
+              <a:t>07.01.2026</a:t>
             </a:fld>
             <a:endParaRPr lang="cs-CZ"/>
           </a:p>
@@ -2921,7 +4252,7 @@
           <a:p>
             <a:fld id="{5CF6437A-2C7A-4D90-8889-FD5FDE1B78D3}" type="datetimeFigureOut">
               <a:rPr lang="cs-CZ" smtClean="0"/>
-              <a:t>05.12.2025</a:t>
+              <a:t>07.01.2026</a:t>
             </a:fld>
             <a:endParaRPr lang="cs-CZ"/>
           </a:p>
@@ -3603,7 +4934,7 @@
         <p:cNvPr id="1" name="">
           <a:extLst>
             <a:ext uri="{FF2B5EF4-FFF2-40B4-BE49-F238E27FC236}">
-              <a16:creationId xmlns:a16="http://schemas.microsoft.com/office/drawing/2014/main" id="{D66339B0-4A57-8FD7-06E3-123F8D8C3D7B}"/>
+              <a16:creationId xmlns:a16="http://schemas.microsoft.com/office/drawing/2014/main" id="{554993C4-634D-D85D-7052-011480DF3347}"/>
             </a:ext>
           </a:extLst>
         </p:cNvPr>
@@ -3623,7 +4954,7 @@
           <p:cNvPr id="5" name="Obdélník 4">
             <a:extLst>
               <a:ext uri="{FF2B5EF4-FFF2-40B4-BE49-F238E27FC236}">
-                <a16:creationId xmlns:a16="http://schemas.microsoft.com/office/drawing/2014/main" id="{2223DC80-51BE-ED4A-4C72-3C4032D6CC4F}"/>
+                <a16:creationId xmlns:a16="http://schemas.microsoft.com/office/drawing/2014/main" id="{5E13D0E5-D673-9CBE-4FBA-EB9A90F17FE3}"/>
               </a:ext>
             </a:extLst>
           </p:cNvPr>
@@ -3686,7 +5017,7 @@
           <p:cNvPr id="4" name="TextovéPole 3">
             <a:extLst>
               <a:ext uri="{FF2B5EF4-FFF2-40B4-BE49-F238E27FC236}">
-                <a16:creationId xmlns:a16="http://schemas.microsoft.com/office/drawing/2014/main" id="{67D3CDC9-A851-6CB6-30A6-523C948CDCC3}"/>
+                <a16:creationId xmlns:a16="http://schemas.microsoft.com/office/drawing/2014/main" id="{C0285895-7052-0F25-5987-9EC40F7B27FD}"/>
               </a:ext>
             </a:extLst>
           </p:cNvPr>
@@ -3695,7 +5026,7 @@
         </p:nvSpPr>
         <p:spPr>
           <a:xfrm>
-            <a:off x="3267075" y="292100"/>
+            <a:off x="3267075" y="345625"/>
             <a:ext cx="5657850" cy="369332"/>
           </a:xfrm>
           <a:prstGeom prst="rect">
@@ -3711,25 +5042,63 @@
           <a:p>
             <a:pPr algn="ctr"/>
             <a:r>
+              <a:rPr lang="cs-CZ" dirty="0">
+                <a:latin typeface="Segoe UI" panose="020B0502040204020203" pitchFamily="34" charset="0"/>
+                <a:cs typeface="Segoe UI" panose="020B0502040204020203" pitchFamily="34" charset="0"/>
+              </a:rPr>
+              <a:t>Sentiment </a:t>
+            </a:r>
+            <a:r>
               <a:rPr lang="cs-CZ" dirty="0" err="1">
                 <a:latin typeface="Segoe UI" panose="020B0502040204020203" pitchFamily="34" charset="0"/>
                 <a:cs typeface="Segoe UI" panose="020B0502040204020203" pitchFamily="34" charset="0"/>
               </a:rPr>
-              <a:t>Topic</a:t>
-            </a:r>
-            <a:endParaRPr lang="cs-CZ" dirty="0">
-              <a:latin typeface="Segoe UI" panose="020B0502040204020203" pitchFamily="34" charset="0"/>
-              <a:cs typeface="Segoe UI" panose="020B0502040204020203" pitchFamily="34" charset="0"/>
-            </a:endParaRPr>
+              <a:t>contrast</a:t>
+            </a:r>
+            <a:r>
+              <a:rPr lang="cs-CZ" dirty="0">
+                <a:latin typeface="Segoe UI" panose="020B0502040204020203" pitchFamily="34" charset="0"/>
+                <a:cs typeface="Segoe UI" panose="020B0502040204020203" pitchFamily="34" charset="0"/>
+              </a:rPr>
+              <a:t> (r/</a:t>
+            </a:r>
+            <a:r>
+              <a:rPr lang="cs-CZ" dirty="0" err="1">
+                <a:latin typeface="Segoe UI" panose="020B0502040204020203" pitchFamily="34" charset="0"/>
+                <a:cs typeface="Segoe UI" panose="020B0502040204020203" pitchFamily="34" charset="0"/>
+              </a:rPr>
+              <a:t>GoT</a:t>
+            </a:r>
+            <a:r>
+              <a:rPr lang="cs-CZ" dirty="0">
+                <a:latin typeface="Segoe UI" panose="020B0502040204020203" pitchFamily="34" charset="0"/>
+                <a:cs typeface="Segoe UI" panose="020B0502040204020203" pitchFamily="34" charset="0"/>
+              </a:rPr>
+              <a:t>, r/</a:t>
+            </a:r>
+            <a:r>
+              <a:rPr lang="cs-CZ" dirty="0" err="1">
+                <a:latin typeface="Segoe UI" panose="020B0502040204020203" pitchFamily="34" charset="0"/>
+                <a:cs typeface="Segoe UI" panose="020B0502040204020203" pitchFamily="34" charset="0"/>
+              </a:rPr>
+              <a:t>FreeFolk</a:t>
+            </a:r>
+            <a:r>
+              <a:rPr lang="cs-CZ" dirty="0">
+                <a:latin typeface="Segoe UI" panose="020B0502040204020203" pitchFamily="34" charset="0"/>
+                <a:cs typeface="Segoe UI" panose="020B0502040204020203" pitchFamily="34" charset="0"/>
+              </a:rPr>
+              <a:t>)</a:t>
+            </a:r>
           </a:p>
         </p:txBody>
       </p:sp>
       <p:pic>
         <p:nvPicPr>
-          <p:cNvPr id="3076" name="Picture 4">
-            <a:extLst>
-              <a:ext uri="{FF2B5EF4-FFF2-40B4-BE49-F238E27FC236}">
-                <a16:creationId xmlns:a16="http://schemas.microsoft.com/office/drawing/2014/main" id="{5B0A5E07-7BAD-7DAD-8F79-FF605C9EF197}"/>
+          <p:cNvPr id="4098" name="Picture 2">
+            <a:extLst>
+              <a:ext uri="{FF2B5EF4-FFF2-40B4-BE49-F238E27FC236}">
+                <a16:creationId xmlns:a16="http://schemas.microsoft.com/office/drawing/2014/main" id="{548C9536-9B7D-37C1-2A91-E030F3015456}"/>
               </a:ext>
             </a:extLst>
           </p:cNvPr>
@@ -3741,7 +5110,7 @@
           </p:nvPr>
         </p:nvPicPr>
         <p:blipFill>
-          <a:blip r:embed="rId2">
+          <a:blip r:embed="rId3">
             <a:extLst>
               <a:ext uri="{28A0092B-C50C-407E-A947-70E740481C1C}">
                 <a14:useLocalDpi xmlns:a14="http://schemas.microsoft.com/office/drawing/2010/main" val="0"/>
@@ -3755,8 +5124,8 @@
         </p:blipFill>
         <p:spPr bwMode="auto">
           <a:xfrm>
-            <a:off x="2260798" y="872198"/>
-            <a:ext cx="7670403" cy="5113603"/>
+            <a:off x="2428900" y="984265"/>
+            <a:ext cx="7334199" cy="4889467"/>
           </a:xfrm>
           <a:prstGeom prst="rect">
             <a:avLst/>
@@ -3776,7 +5145,7 @@
     </p:spTree>
     <p:extLst>
       <p:ext uri="{BB962C8B-B14F-4D97-AF65-F5344CB8AC3E}">
-        <p14:creationId xmlns:p14="http://schemas.microsoft.com/office/powerpoint/2010/main" val="2300714850"/>
+        <p14:creationId xmlns:p14="http://schemas.microsoft.com/office/powerpoint/2010/main" val="1194153298"/>
       </p:ext>
     </p:extLst>
   </p:cSld>
@@ -3874,53 +5243,6 @@
       </p:sp>
       <p:pic>
         <p:nvPicPr>
-          <p:cNvPr id="3" name="Picture 4" descr="Star Jedi">
-            <a:extLst>
-              <a:ext uri="{FF2B5EF4-FFF2-40B4-BE49-F238E27FC236}">
-                <a16:creationId xmlns:a16="http://schemas.microsoft.com/office/drawing/2014/main" id="{FEA74B1F-E1DB-8902-2E6A-43DAE54D881C}"/>
-              </a:ext>
-            </a:extLst>
-          </p:cNvPr>
-          <p:cNvPicPr>
-            <a:picLocks noChangeAspect="1" noChangeArrowheads="1"/>
-          </p:cNvPicPr>
-          <p:nvPr/>
-        </p:nvPicPr>
-        <p:blipFill>
-          <a:blip r:embed="rId2">
-            <a:extLst>
-              <a:ext uri="{28A0092B-C50C-407E-A947-70E740481C1C}">
-                <a14:useLocalDpi xmlns:a14="http://schemas.microsoft.com/office/drawing/2010/main" val="0"/>
-              </a:ext>
-            </a:extLst>
-          </a:blip>
-          <a:srcRect/>
-          <a:stretch>
-            <a:fillRect/>
-          </a:stretch>
-        </p:blipFill>
-        <p:spPr bwMode="auto">
-          <a:xfrm>
-            <a:off x="4870496" y="363884"/>
-            <a:ext cx="2451008" cy="237430"/>
-          </a:xfrm>
-          <a:prstGeom prst="rect">
-            <a:avLst/>
-          </a:prstGeom>
-          <a:noFill/>
-          <a:extLst>
-            <a:ext uri="{909E8E84-426E-40DD-AFC4-6F175D3DCCD1}">
-              <a14:hiddenFill xmlns:a14="http://schemas.microsoft.com/office/drawing/2010/main">
-                <a:solidFill>
-                  <a:srgbClr val="FFFFFF"/>
-                </a:solidFill>
-              </a14:hiddenFill>
-            </a:ext>
-          </a:extLst>
-        </p:spPr>
-      </p:pic>
-      <p:pic>
-        <p:nvPicPr>
           <p:cNvPr id="5126" name="Picture 6">
             <a:extLst>
               <a:ext uri="{FF2B5EF4-FFF2-40B4-BE49-F238E27FC236}">
@@ -4001,6 +5323,101 @@
               <a:t>Datta, S., &amp; Adar, E. (2019). Extracting Inter-Community Conflicts in Reddit. Proceedings of the International AAAI Conference on Web and Social Media, 13(01), 146-157</a:t>
             </a:r>
             <a:endParaRPr lang="cs-CZ" sz="1050" dirty="0"/>
+          </a:p>
+        </p:txBody>
+      </p:sp>
+      <p:sp>
+        <p:nvSpPr>
+          <p:cNvPr id="2" name="TextovéPole 1">
+            <a:extLst>
+              <a:ext uri="{FF2B5EF4-FFF2-40B4-BE49-F238E27FC236}">
+                <a16:creationId xmlns:a16="http://schemas.microsoft.com/office/drawing/2014/main" id="{B31A6BF3-96BD-FCF5-CBCA-99C9B08E04AD}"/>
+              </a:ext>
+            </a:extLst>
+          </p:cNvPr>
+          <p:cNvSpPr txBox="1"/>
+          <p:nvPr/>
+        </p:nvSpPr>
+        <p:spPr>
+          <a:xfrm>
+            <a:off x="3267075" y="246617"/>
+            <a:ext cx="5657850" cy="369332"/>
+          </a:xfrm>
+          <a:prstGeom prst="rect">
+            <a:avLst/>
+          </a:prstGeom>
+          <a:noFill/>
+        </p:spPr>
+        <p:txBody>
+          <a:bodyPr wrap="square" rtlCol="0">
+            <a:spAutoFit/>
+          </a:bodyPr>
+          <a:lstStyle/>
+          <a:p>
+            <a:pPr algn="ctr"/>
+            <a:r>
+              <a:rPr lang="cs-CZ" dirty="0">
+                <a:latin typeface="Segoe UI" panose="020B0502040204020203" pitchFamily="34" charset="0"/>
+                <a:cs typeface="Segoe UI" panose="020B0502040204020203" pitchFamily="34" charset="0"/>
+              </a:rPr>
+              <a:t>Inter-</a:t>
+            </a:r>
+            <a:r>
+              <a:rPr lang="cs-CZ" dirty="0" err="1">
+                <a:latin typeface="Segoe UI" panose="020B0502040204020203" pitchFamily="34" charset="0"/>
+                <a:cs typeface="Segoe UI" panose="020B0502040204020203" pitchFamily="34" charset="0"/>
+              </a:rPr>
+              <a:t>community</a:t>
+            </a:r>
+            <a:r>
+              <a:rPr lang="cs-CZ" dirty="0">
+                <a:latin typeface="Segoe UI" panose="020B0502040204020203" pitchFamily="34" charset="0"/>
+                <a:cs typeface="Segoe UI" panose="020B0502040204020203" pitchFamily="34" charset="0"/>
+              </a:rPr>
+              <a:t> </a:t>
+            </a:r>
+            <a:r>
+              <a:rPr lang="cs-CZ" dirty="0" err="1">
+                <a:latin typeface="Segoe UI" panose="020B0502040204020203" pitchFamily="34" charset="0"/>
+                <a:cs typeface="Segoe UI" panose="020B0502040204020203" pitchFamily="34" charset="0"/>
+              </a:rPr>
+              <a:t>conflict</a:t>
+            </a:r>
+            <a:r>
+              <a:rPr lang="cs-CZ" dirty="0">
+                <a:latin typeface="Segoe UI" panose="020B0502040204020203" pitchFamily="34" charset="0"/>
+                <a:cs typeface="Segoe UI" panose="020B0502040204020203" pitchFamily="34" charset="0"/>
+              </a:rPr>
+              <a:t> (r/</a:t>
+            </a:r>
+            <a:r>
+              <a:rPr lang="cs-CZ" dirty="0" err="1">
+                <a:latin typeface="Segoe UI" panose="020B0502040204020203" pitchFamily="34" charset="0"/>
+                <a:cs typeface="Segoe UI" panose="020B0502040204020203" pitchFamily="34" charset="0"/>
+              </a:rPr>
+              <a:t>GoT</a:t>
+            </a:r>
+            <a:r>
+              <a:rPr lang="cs-CZ" dirty="0">
+                <a:latin typeface="Segoe UI" panose="020B0502040204020203" pitchFamily="34" charset="0"/>
+                <a:cs typeface="Segoe UI" panose="020B0502040204020203" pitchFamily="34" charset="0"/>
+              </a:rPr>
+              <a:t>, r/</a:t>
+            </a:r>
+            <a:r>
+              <a:rPr lang="cs-CZ" dirty="0" err="1">
+                <a:latin typeface="Segoe UI" panose="020B0502040204020203" pitchFamily="34" charset="0"/>
+                <a:cs typeface="Segoe UI" panose="020B0502040204020203" pitchFamily="34" charset="0"/>
+              </a:rPr>
+              <a:t>FreeFolk</a:t>
+            </a:r>
+            <a:r>
+              <a:rPr lang="cs-CZ" dirty="0">
+                <a:latin typeface="Segoe UI" panose="020B0502040204020203" pitchFamily="34" charset="0"/>
+                <a:cs typeface="Segoe UI" panose="020B0502040204020203" pitchFamily="34" charset="0"/>
+              </a:rPr>
+              <a:t>)</a:t>
+            </a:r>
           </a:p>
         </p:txBody>
       </p:sp>
@@ -4105,69 +5522,22 @@
       </p:sp>
       <p:pic>
         <p:nvPicPr>
-          <p:cNvPr id="3" name="Picture 4" descr="Star Jedi">
-            <a:extLst>
-              <a:ext uri="{FF2B5EF4-FFF2-40B4-BE49-F238E27FC236}">
-                <a16:creationId xmlns:a16="http://schemas.microsoft.com/office/drawing/2014/main" id="{9E55FD42-BBE1-7426-F1F1-B36B20CA882F}"/>
+          <p:cNvPr id="5124" name="Picture 4">
+            <a:extLst>
+              <a:ext uri="{FF2B5EF4-FFF2-40B4-BE49-F238E27FC236}">
+                <a16:creationId xmlns:a16="http://schemas.microsoft.com/office/drawing/2014/main" id="{53A14388-7F8F-7F11-4AC0-5C55421AC463}"/>
               </a:ext>
             </a:extLst>
           </p:cNvPr>
           <p:cNvPicPr>
-            <a:picLocks noChangeAspect="1" noChangeArrowheads="1"/>
+            <a:picLocks noGrp="1" noChangeAspect="1" noChangeArrowheads="1"/>
           </p:cNvPicPr>
-          <p:nvPr/>
+          <p:nvPr>
+            <p:ph idx="1"/>
+          </p:nvPr>
         </p:nvPicPr>
         <p:blipFill>
           <a:blip r:embed="rId2">
-            <a:extLst>
-              <a:ext uri="{28A0092B-C50C-407E-A947-70E740481C1C}">
-                <a14:useLocalDpi xmlns:a14="http://schemas.microsoft.com/office/drawing/2010/main" val="0"/>
-              </a:ext>
-            </a:extLst>
-          </a:blip>
-          <a:srcRect/>
-          <a:stretch>
-            <a:fillRect/>
-          </a:stretch>
-        </p:blipFill>
-        <p:spPr bwMode="auto">
-          <a:xfrm>
-            <a:off x="4870496" y="363884"/>
-            <a:ext cx="2451008" cy="237430"/>
-          </a:xfrm>
-          <a:prstGeom prst="rect">
-            <a:avLst/>
-          </a:prstGeom>
-          <a:noFill/>
-          <a:extLst>
-            <a:ext uri="{909E8E84-426E-40DD-AFC4-6F175D3DCCD1}">
-              <a14:hiddenFill xmlns:a14="http://schemas.microsoft.com/office/drawing/2010/main">
-                <a:solidFill>
-                  <a:srgbClr val="FFFFFF"/>
-                </a:solidFill>
-              </a14:hiddenFill>
-            </a:ext>
-          </a:extLst>
-        </p:spPr>
-      </p:pic>
-      <p:pic>
-        <p:nvPicPr>
-          <p:cNvPr id="5124" name="Picture 4">
-            <a:extLst>
-              <a:ext uri="{FF2B5EF4-FFF2-40B4-BE49-F238E27FC236}">
-                <a16:creationId xmlns:a16="http://schemas.microsoft.com/office/drawing/2014/main" id="{53A14388-7F8F-7F11-4AC0-5C55421AC463}"/>
-              </a:ext>
-            </a:extLst>
-          </p:cNvPr>
-          <p:cNvPicPr>
-            <a:picLocks noGrp="1" noChangeAspect="1" noChangeArrowheads="1"/>
-          </p:cNvPicPr>
-          <p:nvPr>
-            <p:ph idx="1"/>
-          </p:nvPr>
-        </p:nvPicPr>
-        <p:blipFill>
-          <a:blip r:embed="rId3">
             <a:extLst>
               <a:ext uri="{28A0092B-C50C-407E-A947-70E740481C1C}">
                 <a14:useLocalDpi xmlns:a14="http://schemas.microsoft.com/office/drawing/2010/main" val="0"/>
@@ -4232,6 +5602,101 @@
               <a:t>Datta, S., &amp; Adar, E. (2019). Extracting Inter-Community Conflicts in Reddit. Proceedings of the International AAAI Conference on Web and Social Media, 13(01), 146-157</a:t>
             </a:r>
             <a:endParaRPr lang="cs-CZ" sz="1050" dirty="0"/>
+          </a:p>
+        </p:txBody>
+      </p:sp>
+      <p:sp>
+        <p:nvSpPr>
+          <p:cNvPr id="4" name="TextovéPole 3">
+            <a:extLst>
+              <a:ext uri="{FF2B5EF4-FFF2-40B4-BE49-F238E27FC236}">
+                <a16:creationId xmlns:a16="http://schemas.microsoft.com/office/drawing/2014/main" id="{AE3486AC-9972-012A-C8F8-75D31566B226}"/>
+              </a:ext>
+            </a:extLst>
+          </p:cNvPr>
+          <p:cNvSpPr txBox="1"/>
+          <p:nvPr/>
+        </p:nvSpPr>
+        <p:spPr>
+          <a:xfrm>
+            <a:off x="3267075" y="301733"/>
+            <a:ext cx="5657850" cy="369332"/>
+          </a:xfrm>
+          <a:prstGeom prst="rect">
+            <a:avLst/>
+          </a:prstGeom>
+          <a:noFill/>
+        </p:spPr>
+        <p:txBody>
+          <a:bodyPr wrap="square" rtlCol="0">
+            <a:spAutoFit/>
+          </a:bodyPr>
+          <a:lstStyle/>
+          <a:p>
+            <a:pPr algn="ctr"/>
+            <a:r>
+              <a:rPr lang="cs-CZ" dirty="0">
+                <a:latin typeface="Segoe UI" panose="020B0502040204020203" pitchFamily="34" charset="0"/>
+                <a:cs typeface="Segoe UI" panose="020B0502040204020203" pitchFamily="34" charset="0"/>
+              </a:rPr>
+              <a:t>Inter-</a:t>
+            </a:r>
+            <a:r>
+              <a:rPr lang="cs-CZ" dirty="0" err="1">
+                <a:latin typeface="Segoe UI" panose="020B0502040204020203" pitchFamily="34" charset="0"/>
+                <a:cs typeface="Segoe UI" panose="020B0502040204020203" pitchFamily="34" charset="0"/>
+              </a:rPr>
+              <a:t>community</a:t>
+            </a:r>
+            <a:r>
+              <a:rPr lang="cs-CZ" dirty="0">
+                <a:latin typeface="Segoe UI" panose="020B0502040204020203" pitchFamily="34" charset="0"/>
+                <a:cs typeface="Segoe UI" panose="020B0502040204020203" pitchFamily="34" charset="0"/>
+              </a:rPr>
+              <a:t> </a:t>
+            </a:r>
+            <a:r>
+              <a:rPr lang="cs-CZ" dirty="0" err="1">
+                <a:latin typeface="Segoe UI" panose="020B0502040204020203" pitchFamily="34" charset="0"/>
+                <a:cs typeface="Segoe UI" panose="020B0502040204020203" pitchFamily="34" charset="0"/>
+              </a:rPr>
+              <a:t>conflict</a:t>
+            </a:r>
+            <a:r>
+              <a:rPr lang="cs-CZ" dirty="0">
+                <a:latin typeface="Segoe UI" panose="020B0502040204020203" pitchFamily="34" charset="0"/>
+                <a:cs typeface="Segoe UI" panose="020B0502040204020203" pitchFamily="34" charset="0"/>
+              </a:rPr>
+              <a:t> (r/</a:t>
+            </a:r>
+            <a:r>
+              <a:rPr lang="cs-CZ" dirty="0" err="1">
+                <a:latin typeface="Segoe UI" panose="020B0502040204020203" pitchFamily="34" charset="0"/>
+                <a:cs typeface="Segoe UI" panose="020B0502040204020203" pitchFamily="34" charset="0"/>
+              </a:rPr>
+              <a:t>GoT</a:t>
+            </a:r>
+            <a:r>
+              <a:rPr lang="cs-CZ" dirty="0">
+                <a:latin typeface="Segoe UI" panose="020B0502040204020203" pitchFamily="34" charset="0"/>
+                <a:cs typeface="Segoe UI" panose="020B0502040204020203" pitchFamily="34" charset="0"/>
+              </a:rPr>
+              <a:t>, r/</a:t>
+            </a:r>
+            <a:r>
+              <a:rPr lang="cs-CZ" dirty="0" err="1">
+                <a:latin typeface="Segoe UI" panose="020B0502040204020203" pitchFamily="34" charset="0"/>
+                <a:cs typeface="Segoe UI" panose="020B0502040204020203" pitchFamily="34" charset="0"/>
+              </a:rPr>
+              <a:t>FreeFolk</a:t>
+            </a:r>
+            <a:r>
+              <a:rPr lang="cs-CZ" dirty="0">
+                <a:latin typeface="Segoe UI" panose="020B0502040204020203" pitchFamily="34" charset="0"/>
+                <a:cs typeface="Segoe UI" panose="020B0502040204020203" pitchFamily="34" charset="0"/>
+              </a:rPr>
+              <a:t>)</a:t>
+            </a:r>
           </a:p>
         </p:txBody>
       </p:sp>
@@ -4724,20 +6189,6 @@
                 <a:cs typeface="Segoe UI" panose="020B0502040204020203" pitchFamily="34" charset="0"/>
               </a:rPr>
               <a:t>subreddits</a:t>
-            </a:r>
-            <a:r>
-              <a:rPr lang="cs-CZ" dirty="0">
-                <a:latin typeface="Segoe UI" panose="020B0502040204020203" pitchFamily="34" charset="0"/>
-                <a:cs typeface="Segoe UI" panose="020B0502040204020203" pitchFamily="34" charset="0"/>
-              </a:rPr>
-              <a:t>, </a:t>
-            </a:r>
-            <a:r>
-              <a:rPr lang="cs-CZ" dirty="0" err="1">
-                <a:latin typeface="Segoe UI" panose="020B0502040204020203" pitchFamily="34" charset="0"/>
-                <a:cs typeface="Segoe UI" panose="020B0502040204020203" pitchFamily="34" charset="0"/>
-              </a:rPr>
-              <a:t>boards</a:t>
             </a:r>
             <a:r>
               <a:rPr lang="cs-CZ" dirty="0">
@@ -5042,6 +6493,42 @@
               <a:rPr lang="cs-CZ" dirty="0" err="1">
                 <a:latin typeface="Segoe UI" panose="020B0502040204020203" pitchFamily="34" charset="0"/>
                 <a:cs typeface="Segoe UI" panose="020B0502040204020203" pitchFamily="34" charset="0"/>
+                <a:hlinkClick r:id="rId3"/>
+              </a:rPr>
+              <a:t>Academic</a:t>
+            </a:r>
+            <a:r>
+              <a:rPr lang="cs-CZ" dirty="0">
+                <a:latin typeface="Segoe UI" panose="020B0502040204020203" pitchFamily="34" charset="0"/>
+                <a:cs typeface="Segoe UI" panose="020B0502040204020203" pitchFamily="34" charset="0"/>
+                <a:hlinkClick r:id="rId3"/>
+              </a:rPr>
+              <a:t> </a:t>
+            </a:r>
+            <a:r>
+              <a:rPr lang="cs-CZ" dirty="0" err="1">
+                <a:latin typeface="Segoe UI" panose="020B0502040204020203" pitchFamily="34" charset="0"/>
+                <a:cs typeface="Segoe UI" panose="020B0502040204020203" pitchFamily="34" charset="0"/>
+                <a:hlinkClick r:id="rId3"/>
+              </a:rPr>
+              <a:t>Torrents</a:t>
+            </a:r>
+            <a:endParaRPr lang="cs-CZ" dirty="0">
+              <a:latin typeface="Segoe UI" panose="020B0502040204020203" pitchFamily="34" charset="0"/>
+              <a:cs typeface="Segoe UI" panose="020B0502040204020203" pitchFamily="34" charset="0"/>
+            </a:endParaRPr>
+          </a:p>
+          <a:p>
+            <a:endParaRPr lang="cs-CZ" dirty="0">
+              <a:latin typeface="Segoe UI" panose="020B0502040204020203" pitchFamily="34" charset="0"/>
+              <a:cs typeface="Segoe UI" panose="020B0502040204020203" pitchFamily="34" charset="0"/>
+            </a:endParaRPr>
+          </a:p>
+          <a:p>
+            <a:r>
+              <a:rPr lang="cs-CZ" dirty="0" err="1">
+                <a:latin typeface="Segoe UI" panose="020B0502040204020203" pitchFamily="34" charset="0"/>
+                <a:cs typeface="Segoe UI" panose="020B0502040204020203" pitchFamily="34" charset="0"/>
               </a:rPr>
               <a:t>Subreddits</a:t>
             </a:r>
@@ -5166,7 +6653,7 @@
           <p:nvPr/>
         </p:nvPicPr>
         <p:blipFill>
-          <a:blip r:embed="rId2">
+          <a:blip r:embed="rId4">
             <a:extLst>
               <a:ext uri="{28A0092B-C50C-407E-A947-70E740481C1C}">
                 <a14:useLocalDpi xmlns:a14="http://schemas.microsoft.com/office/drawing/2010/main" val="0"/>
@@ -5180,7 +6667,7 @@
         </p:blipFill>
         <p:spPr bwMode="auto">
           <a:xfrm>
-            <a:off x="6499477" y="888719"/>
+            <a:off x="7102727" y="888719"/>
             <a:ext cx="3390569" cy="5080560"/>
           </a:xfrm>
           <a:prstGeom prst="rect">
@@ -5562,8 +7049,33 @@
                 <a:latin typeface="Segoe UI" panose="020B0502040204020203" pitchFamily="34" charset="0"/>
                 <a:cs typeface="Segoe UI" panose="020B0502040204020203" pitchFamily="34" charset="0"/>
               </a:rPr>
+              <a:t>Inter-</a:t>
+            </a:r>
+            <a:r>
+              <a:rPr lang="cs-CZ" dirty="0" err="1">
+                <a:latin typeface="Segoe UI" panose="020B0502040204020203" pitchFamily="34" charset="0"/>
+                <a:cs typeface="Segoe UI" panose="020B0502040204020203" pitchFamily="34" charset="0"/>
+              </a:rPr>
+              <a:t>community</a:t>
+            </a:r>
+            <a:r>
+              <a:rPr lang="cs-CZ" dirty="0">
+                <a:latin typeface="Segoe UI" panose="020B0502040204020203" pitchFamily="34" charset="0"/>
+                <a:cs typeface="Segoe UI" panose="020B0502040204020203" pitchFamily="34" charset="0"/>
+              </a:rPr>
               <a:t> </a:t>
             </a:r>
+            <a:r>
+              <a:rPr lang="cs-CZ" dirty="0" err="1">
+                <a:latin typeface="Segoe UI" panose="020B0502040204020203" pitchFamily="34" charset="0"/>
+                <a:cs typeface="Segoe UI" panose="020B0502040204020203" pitchFamily="34" charset="0"/>
+              </a:rPr>
+              <a:t>conflict</a:t>
+            </a:r>
+            <a:endParaRPr lang="cs-CZ" dirty="0">
+              <a:latin typeface="Segoe UI" panose="020B0502040204020203" pitchFamily="34" charset="0"/>
+              <a:cs typeface="Segoe UI" panose="020B0502040204020203" pitchFamily="34" charset="0"/>
+            </a:endParaRPr>
           </a:p>
           <a:p>
             <a:pPr marL="0" indent="0">
@@ -5588,53 +7100,6 @@
       </p:sp>
       <p:pic>
         <p:nvPicPr>
-          <p:cNvPr id="7" name="Picture 4" descr="Star Jedi">
-            <a:extLst>
-              <a:ext uri="{FF2B5EF4-FFF2-40B4-BE49-F238E27FC236}">
-                <a16:creationId xmlns:a16="http://schemas.microsoft.com/office/drawing/2014/main" id="{993FE7FA-F1C2-D803-717D-CF68B11D2E32}"/>
-              </a:ext>
-            </a:extLst>
-          </p:cNvPr>
-          <p:cNvPicPr>
-            <a:picLocks noChangeAspect="1" noChangeArrowheads="1"/>
-          </p:cNvPicPr>
-          <p:nvPr/>
-        </p:nvPicPr>
-        <p:blipFill>
-          <a:blip r:embed="rId2">
-            <a:extLst>
-              <a:ext uri="{28A0092B-C50C-407E-A947-70E740481C1C}">
-                <a14:useLocalDpi xmlns:a14="http://schemas.microsoft.com/office/drawing/2010/main" val="0"/>
-              </a:ext>
-            </a:extLst>
-          </a:blip>
-          <a:srcRect/>
-          <a:stretch>
-            <a:fillRect/>
-          </a:stretch>
-        </p:blipFill>
-        <p:spPr bwMode="auto">
-          <a:xfrm>
-            <a:off x="1186856" y="5042696"/>
-            <a:ext cx="2451008" cy="237430"/>
-          </a:xfrm>
-          <a:prstGeom prst="rect">
-            <a:avLst/>
-          </a:prstGeom>
-          <a:noFill/>
-          <a:extLst>
-            <a:ext uri="{909E8E84-426E-40DD-AFC4-6F175D3DCCD1}">
-              <a14:hiddenFill xmlns:a14="http://schemas.microsoft.com/office/drawing/2010/main">
-                <a:solidFill>
-                  <a:srgbClr val="FFFFFF"/>
-                </a:solidFill>
-              </a14:hiddenFill>
-            </a:ext>
-          </a:extLst>
-        </p:spPr>
-      </p:pic>
-      <p:pic>
-        <p:nvPicPr>
           <p:cNvPr id="9" name="Obrázek 8">
             <a:extLst>
               <a:ext uri="{FF2B5EF4-FFF2-40B4-BE49-F238E27FC236}">
@@ -5648,15 +7113,15 @@
           <p:nvPr/>
         </p:nvPicPr>
         <p:blipFill>
-          <a:blip r:embed="rId3"/>
+          <a:blip r:embed="rId2"/>
           <a:stretch>
             <a:fillRect/>
           </a:stretch>
         </p:blipFill>
         <p:spPr>
           <a:xfrm>
-            <a:off x="7124427" y="3198471"/>
-            <a:ext cx="3446998" cy="2633294"/>
+            <a:off x="8097926" y="2474652"/>
+            <a:ext cx="2498492" cy="1908694"/>
           </a:xfrm>
           <a:prstGeom prst="rect">
             <a:avLst/>
@@ -5709,7 +7174,7 @@
                                         <p:tgtEl>
                                           <p:spTgt spid="3">
                                             <p:txEl>
-                                              <p:pRg st="0" end="0"/>
+                                              <p:pRg st="5" end="5"/>
                                             </p:txEl>
                                           </p:spTgt>
                                         </p:tgtEl>
@@ -5740,7 +7205,7 @@
                                         <p:tgtEl>
                                           <p:spTgt spid="3">
                                             <p:txEl>
-                                              <p:pRg st="1" end="1"/>
+                                              <p:pRg st="6" end="6"/>
                                             </p:txEl>
                                           </p:spTgt>
                                         </p:tgtEl>
@@ -5764,148 +7229,6 @@
                                     <p:set>
                                       <p:cBhvr>
                                         <p:cTn id="10" dur="1" fill="hold">
-                                          <p:stCondLst>
-                                            <p:cond delay="0"/>
-                                          </p:stCondLst>
-                                        </p:cTn>
-                                        <p:tgtEl>
-                                          <p:spTgt spid="3">
-                                            <p:txEl>
-                                              <p:pRg st="2" end="2"/>
-                                            </p:txEl>
-                                          </p:spTgt>
-                                        </p:tgtEl>
-                                        <p:attrNameLst>
-                                          <p:attrName>style.visibility</p:attrName>
-                                        </p:attrNameLst>
-                                      </p:cBhvr>
-                                      <p:to>
-                                        <p:strVal val="visible"/>
-                                      </p:to>
-                                    </p:set>
-                                  </p:childTnLst>
-                                </p:cTn>
-                              </p:par>
-                              <p:par>
-                                <p:cTn id="11" presetID="1" presetClass="entr" presetSubtype="0" fill="hold" nodeType="withEffect">
-                                  <p:stCondLst>
-                                    <p:cond delay="0"/>
-                                  </p:stCondLst>
-                                  <p:childTnLst>
-                                    <p:set>
-                                      <p:cBhvr>
-                                        <p:cTn id="12" dur="1" fill="hold">
-                                          <p:stCondLst>
-                                            <p:cond delay="0"/>
-                                          </p:stCondLst>
-                                        </p:cTn>
-                                        <p:tgtEl>
-                                          <p:spTgt spid="3">
-                                            <p:txEl>
-                                              <p:pRg st="3" end="3"/>
-                                            </p:txEl>
-                                          </p:spTgt>
-                                        </p:tgtEl>
-                                        <p:attrNameLst>
-                                          <p:attrName>style.visibility</p:attrName>
-                                        </p:attrNameLst>
-                                      </p:cBhvr>
-                                      <p:to>
-                                        <p:strVal val="visible"/>
-                                      </p:to>
-                                    </p:set>
-                                  </p:childTnLst>
-                                </p:cTn>
-                              </p:par>
-                            </p:childTnLst>
-                          </p:cTn>
-                        </p:par>
-                      </p:childTnLst>
-                    </p:cTn>
-                  </p:par>
-                  <p:par>
-                    <p:cTn id="13" fill="hold">
-                      <p:stCondLst>
-                        <p:cond delay="indefinite"/>
-                      </p:stCondLst>
-                      <p:childTnLst>
-                        <p:par>
-                          <p:cTn id="14" fill="hold">
-                            <p:stCondLst>
-                              <p:cond delay="0"/>
-                            </p:stCondLst>
-                            <p:childTnLst>
-                              <p:par>
-                                <p:cTn id="15" presetID="1" presetClass="entr" presetSubtype="0" fill="hold" nodeType="clickEffect">
-                                  <p:stCondLst>
-                                    <p:cond delay="0"/>
-                                  </p:stCondLst>
-                                  <p:childTnLst>
-                                    <p:set>
-                                      <p:cBhvr>
-                                        <p:cTn id="16" dur="1" fill="hold">
-                                          <p:stCondLst>
-                                            <p:cond delay="0"/>
-                                          </p:stCondLst>
-                                        </p:cTn>
-                                        <p:tgtEl>
-                                          <p:spTgt spid="3">
-                                            <p:txEl>
-                                              <p:pRg st="5" end="5"/>
-                                            </p:txEl>
-                                          </p:spTgt>
-                                        </p:tgtEl>
-                                        <p:attrNameLst>
-                                          <p:attrName>style.visibility</p:attrName>
-                                        </p:attrNameLst>
-                                      </p:cBhvr>
-                                      <p:to>
-                                        <p:strVal val="visible"/>
-                                      </p:to>
-                                    </p:set>
-                                  </p:childTnLst>
-                                </p:cTn>
-                              </p:par>
-                              <p:par>
-                                <p:cTn id="17" presetID="1" presetClass="entr" presetSubtype="0" fill="hold" nodeType="withEffect">
-                                  <p:stCondLst>
-                                    <p:cond delay="0"/>
-                                  </p:stCondLst>
-                                  <p:childTnLst>
-                                    <p:set>
-                                      <p:cBhvr>
-                                        <p:cTn id="18" dur="1" fill="hold">
-                                          <p:stCondLst>
-                                            <p:cond delay="0"/>
-                                          </p:stCondLst>
-                                        </p:cTn>
-                                        <p:tgtEl>
-                                          <p:spTgt spid="3">
-                                            <p:txEl>
-                                              <p:pRg st="6" end="6"/>
-                                            </p:txEl>
-                                          </p:spTgt>
-                                        </p:tgtEl>
-                                        <p:attrNameLst>
-                                          <p:attrName>style.visibility</p:attrName>
-                                        </p:attrNameLst>
-                                      </p:cBhvr>
-                                      <p:to>
-                                        <p:strVal val="visible"/>
-                                      </p:to>
-                                    </p:set>
-                                  </p:childTnLst>
-                                </p:cTn>
-                              </p:par>
-                              <p:par>
-                                <p:cTn id="19" presetID="1" presetClass="entr" presetSubtype="0" fill="hold" nodeType="withEffect">
-                                  <p:stCondLst>
-                                    <p:cond delay="0"/>
-                                  </p:stCondLst>
-                                  <p:childTnLst>
-                                    <p:set>
-                                      <p:cBhvr>
-                                        <p:cTn id="20" dur="1" fill="hold">
                                           <p:stCondLst>
                                             <p:cond delay="0"/>
                                           </p:stCondLst>
@@ -6062,7 +7385,7 @@
           </p:nvPr>
         </p:nvPicPr>
         <p:blipFill>
-          <a:blip r:embed="rId2">
+          <a:blip r:embed="rId3">
             <a:extLst>
               <a:ext uri="{28A0092B-C50C-407E-A947-70E740481C1C}">
                 <a14:useLocalDpi xmlns:a14="http://schemas.microsoft.com/office/drawing/2010/main" val="0"/>
@@ -6130,10 +7453,183 @@
               </a:rPr>
               <a:t>Lifespan</a:t>
             </a:r>
-            <a:endParaRPr lang="cs-CZ" dirty="0">
-              <a:latin typeface="Segoe UI" panose="020B0502040204020203" pitchFamily="34" charset="0"/>
-              <a:cs typeface="Segoe UI" panose="020B0502040204020203" pitchFamily="34" charset="0"/>
-            </a:endParaRPr>
+            <a:r>
+              <a:rPr lang="cs-CZ" dirty="0">
+                <a:latin typeface="Segoe UI" panose="020B0502040204020203" pitchFamily="34" charset="0"/>
+                <a:cs typeface="Segoe UI" panose="020B0502040204020203" pitchFamily="34" charset="0"/>
+              </a:rPr>
+              <a:t> (r/</a:t>
+            </a:r>
+            <a:r>
+              <a:rPr lang="cs-CZ" dirty="0" err="1">
+                <a:latin typeface="Segoe UI" panose="020B0502040204020203" pitchFamily="34" charset="0"/>
+                <a:cs typeface="Segoe UI" panose="020B0502040204020203" pitchFamily="34" charset="0"/>
+              </a:rPr>
+              <a:t>GoT</a:t>
+            </a:r>
+            <a:r>
+              <a:rPr lang="cs-CZ" dirty="0">
+                <a:latin typeface="Segoe UI" panose="020B0502040204020203" pitchFamily="34" charset="0"/>
+                <a:cs typeface="Segoe UI" panose="020B0502040204020203" pitchFamily="34" charset="0"/>
+              </a:rPr>
+              <a:t>)</a:t>
+            </a:r>
+          </a:p>
+        </p:txBody>
+      </p:sp>
+      <p:sp>
+        <p:nvSpPr>
+          <p:cNvPr id="3" name="Obdélník 2">
+            <a:extLst>
+              <a:ext uri="{FF2B5EF4-FFF2-40B4-BE49-F238E27FC236}">
+                <a16:creationId xmlns:a16="http://schemas.microsoft.com/office/drawing/2014/main" id="{B58308B2-6FAA-4C16-D38E-C92E1CC42CCC}"/>
+              </a:ext>
+            </a:extLst>
+          </p:cNvPr>
+          <p:cNvSpPr/>
+          <p:nvPr/>
+        </p:nvSpPr>
+        <p:spPr>
+          <a:xfrm>
+            <a:off x="2609850" y="5697322"/>
+            <a:ext cx="657225" cy="158750"/>
+          </a:xfrm>
+          <a:prstGeom prst="rect">
+            <a:avLst/>
+          </a:prstGeom>
+          <a:solidFill>
+            <a:schemeClr val="bg1"/>
+          </a:solidFill>
+          <a:ln>
+            <a:noFill/>
+          </a:ln>
+        </p:spPr>
+        <p:style>
+          <a:lnRef idx="2">
+            <a:schemeClr val="accent1">
+              <a:shade val="15000"/>
+            </a:schemeClr>
+          </a:lnRef>
+          <a:fillRef idx="1">
+            <a:schemeClr val="accent1"/>
+          </a:fillRef>
+          <a:effectRef idx="0">
+            <a:schemeClr val="accent1"/>
+          </a:effectRef>
+          <a:fontRef idx="minor">
+            <a:schemeClr val="lt1"/>
+          </a:fontRef>
+        </p:style>
+        <p:txBody>
+          <a:bodyPr rtlCol="0" anchor="ctr"/>
+          <a:lstStyle/>
+          <a:p>
+            <a:pPr algn="ctr"/>
+            <a:endParaRPr lang="cs-CZ"/>
+          </a:p>
+        </p:txBody>
+      </p:sp>
+      <p:sp>
+        <p:nvSpPr>
+          <p:cNvPr id="4" name="Obdélník 3">
+            <a:extLst>
+              <a:ext uri="{FF2B5EF4-FFF2-40B4-BE49-F238E27FC236}">
+                <a16:creationId xmlns:a16="http://schemas.microsoft.com/office/drawing/2014/main" id="{E7CD70E8-650A-D154-836D-C0ECA2651320}"/>
+              </a:ext>
+            </a:extLst>
+          </p:cNvPr>
+          <p:cNvSpPr/>
+          <p:nvPr/>
+        </p:nvSpPr>
+        <p:spPr>
+          <a:xfrm>
+            <a:off x="8755707" y="5697322"/>
+            <a:ext cx="724843" cy="158750"/>
+          </a:xfrm>
+          <a:prstGeom prst="rect">
+            <a:avLst/>
+          </a:prstGeom>
+          <a:solidFill>
+            <a:schemeClr val="bg1"/>
+          </a:solidFill>
+          <a:ln>
+            <a:noFill/>
+          </a:ln>
+        </p:spPr>
+        <p:style>
+          <a:lnRef idx="2">
+            <a:schemeClr val="accent1">
+              <a:shade val="15000"/>
+            </a:schemeClr>
+          </a:lnRef>
+          <a:fillRef idx="1">
+            <a:schemeClr val="accent1"/>
+          </a:fillRef>
+          <a:effectRef idx="0">
+            <a:schemeClr val="accent1"/>
+          </a:effectRef>
+          <a:fontRef idx="minor">
+            <a:schemeClr val="lt1"/>
+          </a:fontRef>
+        </p:style>
+        <p:txBody>
+          <a:bodyPr rtlCol="0" anchor="ctr"/>
+          <a:lstStyle/>
+          <a:p>
+            <a:pPr algn="ctr"/>
+            <a:endParaRPr lang="cs-CZ"/>
+          </a:p>
+        </p:txBody>
+      </p:sp>
+      <p:sp>
+        <p:nvSpPr>
+          <p:cNvPr id="6" name="Obdélník 5">
+            <a:extLst>
+              <a:ext uri="{FF2B5EF4-FFF2-40B4-BE49-F238E27FC236}">
+                <a16:creationId xmlns:a16="http://schemas.microsoft.com/office/drawing/2014/main" id="{5E68DB72-DDF2-AC40-BAA2-4B48C2FD1BD8}"/>
+              </a:ext>
+            </a:extLst>
+          </p:cNvPr>
+          <p:cNvSpPr/>
+          <p:nvPr/>
+        </p:nvSpPr>
+        <p:spPr>
+          <a:xfrm>
+            <a:off x="5453707" y="5697322"/>
+            <a:ext cx="1339850" cy="106578"/>
+          </a:xfrm>
+          <a:prstGeom prst="rect">
+            <a:avLst/>
+          </a:prstGeom>
+          <a:solidFill>
+            <a:schemeClr val="bg1"/>
+          </a:solidFill>
+          <a:ln>
+            <a:noFill/>
+          </a:ln>
+        </p:spPr>
+        <p:style>
+          <a:lnRef idx="2">
+            <a:schemeClr val="accent1">
+              <a:shade val="15000"/>
+            </a:schemeClr>
+          </a:lnRef>
+          <a:fillRef idx="1">
+            <a:schemeClr val="accent1"/>
+          </a:fillRef>
+          <a:effectRef idx="0">
+            <a:schemeClr val="accent1"/>
+          </a:effectRef>
+          <a:fontRef idx="minor">
+            <a:schemeClr val="lt1"/>
+          </a:fontRef>
+        </p:style>
+        <p:txBody>
+          <a:bodyPr rtlCol="0" anchor="ctr"/>
+          <a:lstStyle/>
+          <a:p>
+            <a:pPr algn="ctr"/>
+            <a:endParaRPr lang="cs-CZ"/>
           </a:p>
         </p:txBody>
       </p:sp>
@@ -6279,10 +7775,13 @@
               </a:rPr>
               <a:t>score</a:t>
             </a:r>
-            <a:endParaRPr lang="cs-CZ" dirty="0">
-              <a:latin typeface="Segoe UI" panose="020B0502040204020203" pitchFamily="34" charset="0"/>
-              <a:cs typeface="Segoe UI" panose="020B0502040204020203" pitchFamily="34" charset="0"/>
-            </a:endParaRPr>
+            <a:r>
+              <a:rPr lang="cs-CZ" dirty="0">
+                <a:latin typeface="Segoe UI" panose="020B0502040204020203" pitchFamily="34" charset="0"/>
+                <a:cs typeface="Segoe UI" panose="020B0502040204020203" pitchFamily="34" charset="0"/>
+              </a:rPr>
+              <a:t> (r/NBA)</a:t>
+            </a:r>
           </a:p>
         </p:txBody>
       </p:sp>
@@ -6301,7 +7800,7 @@
           <p:nvPr/>
         </p:nvPicPr>
         <p:blipFill>
-          <a:blip r:embed="rId2"/>
+          <a:blip r:embed="rId3"/>
           <a:stretch>
             <a:fillRect/>
           </a:stretch>
@@ -6331,7 +7830,7 @@
           <p:nvPr/>
         </p:nvPicPr>
         <p:blipFill>
-          <a:blip r:embed="rId3"/>
+          <a:blip r:embed="rId4"/>
           <a:stretch>
             <a:fillRect/>
           </a:stretch>
@@ -6367,7 +7866,7 @@
         <p:cNvPr id="1" name="">
           <a:extLst>
             <a:ext uri="{FF2B5EF4-FFF2-40B4-BE49-F238E27FC236}">
-              <a16:creationId xmlns:a16="http://schemas.microsoft.com/office/drawing/2014/main" id="{D8D9C25C-1B99-8BBB-77A7-279B7176B752}"/>
+              <a16:creationId xmlns:a16="http://schemas.microsoft.com/office/drawing/2014/main" id="{429117AB-B33B-EA79-67DA-F2D4C35AE8EB}"/>
             </a:ext>
           </a:extLst>
         </p:cNvPr>
@@ -6387,7 +7886,7 @@
           <p:cNvPr id="5" name="Obdélník 4">
             <a:extLst>
               <a:ext uri="{FF2B5EF4-FFF2-40B4-BE49-F238E27FC236}">
-                <a16:creationId xmlns:a16="http://schemas.microsoft.com/office/drawing/2014/main" id="{AE188261-2BED-C435-D9B7-2726A029CEAE}"/>
+                <a16:creationId xmlns:a16="http://schemas.microsoft.com/office/drawing/2014/main" id="{1D1B12F9-AAA7-3805-113E-66E2D21E47BC}"/>
               </a:ext>
             </a:extLst>
           </p:cNvPr>
@@ -6450,7 +7949,7 @@
           <p:cNvPr id="6" name="TextovéPole 5">
             <a:extLst>
               <a:ext uri="{FF2B5EF4-FFF2-40B4-BE49-F238E27FC236}">
-                <a16:creationId xmlns:a16="http://schemas.microsoft.com/office/drawing/2014/main" id="{F36262B7-12A0-F2A9-036C-43A0DDCFEC6F}"/>
+                <a16:creationId xmlns:a16="http://schemas.microsoft.com/office/drawing/2014/main" id="{6963922D-C685-9151-F5AD-53304F6D3A9B}"/>
               </a:ext>
             </a:extLst>
           </p:cNvPr>
@@ -6459,7 +7958,7 @@
         </p:nvSpPr>
         <p:spPr>
           <a:xfrm>
-            <a:off x="3267075" y="345625"/>
+            <a:off x="3267074" y="351975"/>
             <a:ext cx="5657850" cy="369332"/>
           </a:xfrm>
           <a:prstGeom prst="rect">
@@ -6500,7 +7999,7 @@
                 <a:latin typeface="Segoe UI" panose="020B0502040204020203" pitchFamily="34" charset="0"/>
                 <a:cs typeface="Segoe UI" panose="020B0502040204020203" pitchFamily="34" charset="0"/>
               </a:rPr>
-              <a:t>Aww</a:t>
+              <a:t>GoT</a:t>
             </a:r>
             <a:endParaRPr lang="cs-CZ" dirty="0">
               <a:latin typeface="Segoe UI" panose="020B0502040204020203" pitchFamily="34" charset="0"/>
@@ -6511,10 +8010,10 @@
       </p:sp>
       <p:pic>
         <p:nvPicPr>
-          <p:cNvPr id="1028" name="Picture 4">
-            <a:extLst>
-              <a:ext uri="{FF2B5EF4-FFF2-40B4-BE49-F238E27FC236}">
-                <a16:creationId xmlns:a16="http://schemas.microsoft.com/office/drawing/2014/main" id="{8A594D6A-F09E-2103-2B4B-57AE1F378DC2}"/>
+          <p:cNvPr id="2050" name="Picture 2">
+            <a:extLst>
+              <a:ext uri="{FF2B5EF4-FFF2-40B4-BE49-F238E27FC236}">
+                <a16:creationId xmlns:a16="http://schemas.microsoft.com/office/drawing/2014/main" id="{5ABE7B5B-F45B-4614-5F39-C6A4915BCECF}"/>
               </a:ext>
             </a:extLst>
           </p:cNvPr>
@@ -6540,8 +8039,8 @@
         </p:blipFill>
         <p:spPr bwMode="auto">
           <a:xfrm>
-            <a:off x="2362398" y="939932"/>
-            <a:ext cx="7467203" cy="4978136"/>
+            <a:off x="2337791" y="923527"/>
+            <a:ext cx="7516415" cy="5010944"/>
           </a:xfrm>
           <a:prstGeom prst="rect">
             <a:avLst/>
@@ -6561,7 +8060,7 @@
     </p:spTree>
     <p:extLst>
       <p:ext uri="{BB962C8B-B14F-4D97-AF65-F5344CB8AC3E}">
-        <p14:creationId xmlns:p14="http://schemas.microsoft.com/office/powerpoint/2010/main" val="4225280423"/>
+        <p14:creationId xmlns:p14="http://schemas.microsoft.com/office/powerpoint/2010/main" val="1664644898"/>
       </p:ext>
     </p:extLst>
   </p:cSld>
@@ -6579,7 +8078,7 @@
         <p:cNvPr id="1" name="">
           <a:extLst>
             <a:ext uri="{FF2B5EF4-FFF2-40B4-BE49-F238E27FC236}">
-              <a16:creationId xmlns:a16="http://schemas.microsoft.com/office/drawing/2014/main" id="{429117AB-B33B-EA79-67DA-F2D4C35AE8EB}"/>
+              <a16:creationId xmlns:a16="http://schemas.microsoft.com/office/drawing/2014/main" id="{D8D9C25C-1B99-8BBB-77A7-279B7176B752}"/>
             </a:ext>
           </a:extLst>
         </p:cNvPr>
@@ -6599,7 +8098,7 @@
           <p:cNvPr id="5" name="Obdélník 4">
             <a:extLst>
               <a:ext uri="{FF2B5EF4-FFF2-40B4-BE49-F238E27FC236}">
-                <a16:creationId xmlns:a16="http://schemas.microsoft.com/office/drawing/2014/main" id="{1D1B12F9-AAA7-3805-113E-66E2D21E47BC}"/>
+                <a16:creationId xmlns:a16="http://schemas.microsoft.com/office/drawing/2014/main" id="{AE188261-2BED-C435-D9B7-2726A029CEAE}"/>
               </a:ext>
             </a:extLst>
           </p:cNvPr>
@@ -6662,7 +8161,7 @@
           <p:cNvPr id="6" name="TextovéPole 5">
             <a:extLst>
               <a:ext uri="{FF2B5EF4-FFF2-40B4-BE49-F238E27FC236}">
-                <a16:creationId xmlns:a16="http://schemas.microsoft.com/office/drawing/2014/main" id="{6963922D-C685-9151-F5AD-53304F6D3A9B}"/>
+                <a16:creationId xmlns:a16="http://schemas.microsoft.com/office/drawing/2014/main" id="{F36262B7-12A0-F2A9-036C-43A0DDCFEC6F}"/>
               </a:ext>
             </a:extLst>
           </p:cNvPr>
@@ -6671,7 +8170,7 @@
         </p:nvSpPr>
         <p:spPr>
           <a:xfrm>
-            <a:off x="3267074" y="351975"/>
+            <a:off x="3267075" y="345625"/>
             <a:ext cx="5657850" cy="369332"/>
           </a:xfrm>
           <a:prstGeom prst="rect">
@@ -6712,7 +8211,7 @@
                 <a:latin typeface="Segoe UI" panose="020B0502040204020203" pitchFamily="34" charset="0"/>
                 <a:cs typeface="Segoe UI" panose="020B0502040204020203" pitchFamily="34" charset="0"/>
               </a:rPr>
-              <a:t>GoT</a:t>
+              <a:t>Aww</a:t>
             </a:r>
             <a:endParaRPr lang="cs-CZ" dirty="0">
               <a:latin typeface="Segoe UI" panose="020B0502040204020203" pitchFamily="34" charset="0"/>
@@ -6723,10 +8222,10 @@
       </p:sp>
       <p:pic>
         <p:nvPicPr>
-          <p:cNvPr id="2050" name="Picture 2">
-            <a:extLst>
-              <a:ext uri="{FF2B5EF4-FFF2-40B4-BE49-F238E27FC236}">
-                <a16:creationId xmlns:a16="http://schemas.microsoft.com/office/drawing/2014/main" id="{5ABE7B5B-F45B-4614-5F39-C6A4915BCECF}"/>
+          <p:cNvPr id="1028" name="Picture 4">
+            <a:extLst>
+              <a:ext uri="{FF2B5EF4-FFF2-40B4-BE49-F238E27FC236}">
+                <a16:creationId xmlns:a16="http://schemas.microsoft.com/office/drawing/2014/main" id="{8A594D6A-F09E-2103-2B4B-57AE1F378DC2}"/>
               </a:ext>
             </a:extLst>
           </p:cNvPr>
@@ -6738,7 +8237,7 @@
           </p:nvPr>
         </p:nvPicPr>
         <p:blipFill>
-          <a:blip r:embed="rId2">
+          <a:blip r:embed="rId3">
             <a:extLst>
               <a:ext uri="{28A0092B-C50C-407E-A947-70E740481C1C}">
                 <a14:useLocalDpi xmlns:a14="http://schemas.microsoft.com/office/drawing/2010/main" val="0"/>
@@ -6752,8 +8251,8 @@
         </p:blipFill>
         <p:spPr bwMode="auto">
           <a:xfrm>
-            <a:off x="2337791" y="923527"/>
-            <a:ext cx="7516415" cy="5010944"/>
+            <a:off x="2362398" y="939932"/>
+            <a:ext cx="7467203" cy="4978136"/>
           </a:xfrm>
           <a:prstGeom prst="rect">
             <a:avLst/>
@@ -6773,7 +8272,7 @@
     </p:spTree>
     <p:extLst>
       <p:ext uri="{BB962C8B-B14F-4D97-AF65-F5344CB8AC3E}">
-        <p14:creationId xmlns:p14="http://schemas.microsoft.com/office/powerpoint/2010/main" val="1664644898"/>
+        <p14:creationId xmlns:p14="http://schemas.microsoft.com/office/powerpoint/2010/main" val="4225280423"/>
       </p:ext>
     </p:extLst>
   </p:cSld>
@@ -6791,7 +8290,7 @@
         <p:cNvPr id="1" name="">
           <a:extLst>
             <a:ext uri="{FF2B5EF4-FFF2-40B4-BE49-F238E27FC236}">
-              <a16:creationId xmlns:a16="http://schemas.microsoft.com/office/drawing/2014/main" id="{554993C4-634D-D85D-7052-011480DF3347}"/>
+              <a16:creationId xmlns:a16="http://schemas.microsoft.com/office/drawing/2014/main" id="{D66339B0-4A57-8FD7-06E3-123F8D8C3D7B}"/>
             </a:ext>
           </a:extLst>
         </p:cNvPr>
@@ -6811,7 +8310,7 @@
           <p:cNvPr id="5" name="Obdélník 4">
             <a:extLst>
               <a:ext uri="{FF2B5EF4-FFF2-40B4-BE49-F238E27FC236}">
-                <a16:creationId xmlns:a16="http://schemas.microsoft.com/office/drawing/2014/main" id="{5E13D0E5-D673-9CBE-4FBA-EB9A90F17FE3}"/>
+                <a16:creationId xmlns:a16="http://schemas.microsoft.com/office/drawing/2014/main" id="{2223DC80-51BE-ED4A-4C72-3C4032D6CC4F}"/>
               </a:ext>
             </a:extLst>
           </p:cNvPr>
@@ -6874,7 +8373,7 @@
           <p:cNvPr id="4" name="TextovéPole 3">
             <a:extLst>
               <a:ext uri="{FF2B5EF4-FFF2-40B4-BE49-F238E27FC236}">
-                <a16:creationId xmlns:a16="http://schemas.microsoft.com/office/drawing/2014/main" id="{C0285895-7052-0F25-5987-9EC40F7B27FD}"/>
+                <a16:creationId xmlns:a16="http://schemas.microsoft.com/office/drawing/2014/main" id="{67D3CDC9-A851-6CB6-30A6-523C948CDCC3}"/>
               </a:ext>
             </a:extLst>
           </p:cNvPr>
@@ -6883,7 +8382,7 @@
         </p:nvSpPr>
         <p:spPr>
           <a:xfrm>
-            <a:off x="3267075" y="345625"/>
+            <a:off x="3267075" y="292100"/>
             <a:ext cx="5657850" cy="369332"/>
           </a:xfrm>
           <a:prstGeom prst="rect">
@@ -6899,32 +8398,42 @@
           <a:p>
             <a:pPr algn="ctr"/>
             <a:r>
+              <a:rPr lang="cs-CZ" dirty="0" err="1">
+                <a:latin typeface="Segoe UI" panose="020B0502040204020203" pitchFamily="34" charset="0"/>
+                <a:cs typeface="Segoe UI" panose="020B0502040204020203" pitchFamily="34" charset="0"/>
+              </a:rPr>
+              <a:t>Topic</a:t>
+            </a:r>
+            <a:r>
               <a:rPr lang="cs-CZ" dirty="0">
                 <a:latin typeface="Segoe UI" panose="020B0502040204020203" pitchFamily="34" charset="0"/>
                 <a:cs typeface="Segoe UI" panose="020B0502040204020203" pitchFamily="34" charset="0"/>
               </a:rPr>
-              <a:t>Sentiment </a:t>
+              <a:t> (r/</a:t>
             </a:r>
             <a:r>
               <a:rPr lang="cs-CZ" dirty="0" err="1">
                 <a:latin typeface="Segoe UI" panose="020B0502040204020203" pitchFamily="34" charset="0"/>
                 <a:cs typeface="Segoe UI" panose="020B0502040204020203" pitchFamily="34" charset="0"/>
               </a:rPr>
-              <a:t>contrast</a:t>
-            </a:r>
-            <a:endParaRPr lang="cs-CZ" dirty="0">
-              <a:latin typeface="Segoe UI" panose="020B0502040204020203" pitchFamily="34" charset="0"/>
-              <a:cs typeface="Segoe UI" panose="020B0502040204020203" pitchFamily="34" charset="0"/>
-            </a:endParaRPr>
+              <a:t>GoT</a:t>
+            </a:r>
+            <a:r>
+              <a:rPr lang="cs-CZ" dirty="0">
+                <a:latin typeface="Segoe UI" panose="020B0502040204020203" pitchFamily="34" charset="0"/>
+                <a:cs typeface="Segoe UI" panose="020B0502040204020203" pitchFamily="34" charset="0"/>
+              </a:rPr>
+              <a:t>)</a:t>
+            </a:r>
           </a:p>
         </p:txBody>
       </p:sp>
       <p:pic>
         <p:nvPicPr>
-          <p:cNvPr id="4098" name="Picture 2">
-            <a:extLst>
-              <a:ext uri="{FF2B5EF4-FFF2-40B4-BE49-F238E27FC236}">
-                <a16:creationId xmlns:a16="http://schemas.microsoft.com/office/drawing/2014/main" id="{548C9536-9B7D-37C1-2A91-E030F3015456}"/>
+          <p:cNvPr id="3076" name="Picture 4">
+            <a:extLst>
+              <a:ext uri="{FF2B5EF4-FFF2-40B4-BE49-F238E27FC236}">
+                <a16:creationId xmlns:a16="http://schemas.microsoft.com/office/drawing/2014/main" id="{5B0A5E07-7BAD-7DAD-8F79-FF605C9EF197}"/>
               </a:ext>
             </a:extLst>
           </p:cNvPr>
@@ -6936,7 +8445,7 @@
           </p:nvPr>
         </p:nvPicPr>
         <p:blipFill>
-          <a:blip r:embed="rId2">
+          <a:blip r:embed="rId3">
             <a:extLst>
               <a:ext uri="{28A0092B-C50C-407E-A947-70E740481C1C}">
                 <a14:useLocalDpi xmlns:a14="http://schemas.microsoft.com/office/drawing/2010/main" val="0"/>
@@ -6950,8 +8459,8 @@
         </p:blipFill>
         <p:spPr bwMode="auto">
           <a:xfrm>
-            <a:off x="2428900" y="984266"/>
-            <a:ext cx="7334199" cy="4889467"/>
+            <a:off x="2260798" y="872198"/>
+            <a:ext cx="7670403" cy="5113603"/>
           </a:xfrm>
           <a:prstGeom prst="rect">
             <a:avLst/>
@@ -6971,7 +8480,7 @@
     </p:spTree>
     <p:extLst>
       <p:ext uri="{BB962C8B-B14F-4D97-AF65-F5344CB8AC3E}">
-        <p14:creationId xmlns:p14="http://schemas.microsoft.com/office/powerpoint/2010/main" val="1194153298"/>
+        <p14:creationId xmlns:p14="http://schemas.microsoft.com/office/powerpoint/2010/main" val="2300714850"/>
       </p:ext>
     </p:extLst>
   </p:cSld>
@@ -7294,4 +8803,319 @@
     </a:ext>
   </a:extLst>
 </a:theme>
+</file>
+
+<file path=ppt/theme/theme2.xml><?xml version="1.0" encoding="utf-8"?>
+<a:theme xmlns:a="http://schemas.openxmlformats.org/drawingml/2006/main" name="Motiv Office">
+  <a:themeElements>
+    <a:clrScheme name="Office">
+      <a:dk1>
+        <a:sysClr val="windowText" lastClr="000000"/>
+      </a:dk1>
+      <a:lt1>
+        <a:sysClr val="window" lastClr="FFFFFF"/>
+      </a:lt1>
+      <a:dk2>
+        <a:srgbClr val="0E2841"/>
+      </a:dk2>
+      <a:lt2>
+        <a:srgbClr val="E8E8E8"/>
+      </a:lt2>
+      <a:accent1>
+        <a:srgbClr val="156082"/>
+      </a:accent1>
+      <a:accent2>
+        <a:srgbClr val="E97132"/>
+      </a:accent2>
+      <a:accent3>
+        <a:srgbClr val="196B24"/>
+      </a:accent3>
+      <a:accent4>
+        <a:srgbClr val="0F9ED5"/>
+      </a:accent4>
+      <a:accent5>
+        <a:srgbClr val="A02B93"/>
+      </a:accent5>
+      <a:accent6>
+        <a:srgbClr val="4EA72E"/>
+      </a:accent6>
+      <a:hlink>
+        <a:srgbClr val="467886"/>
+      </a:hlink>
+      <a:folHlink>
+        <a:srgbClr val="96607D"/>
+      </a:folHlink>
+    </a:clrScheme>
+    <a:fontScheme name="Office">
+      <a:majorFont>
+        <a:latin typeface="Aptos Display" panose="02110004020202020204"/>
+        <a:ea typeface=""/>
+        <a:cs typeface=""/>
+        <a:font script="Jpan" typeface="游ゴシック Light"/>
+        <a:font script="Hang" typeface="맑은 고딕"/>
+        <a:font script="Hans" typeface="等线 Light"/>
+        <a:font script="Hant" typeface="新細明體"/>
+        <a:font script="Arab" typeface="Times New Roman"/>
+        <a:font script="Hebr" typeface="Times New Roman"/>
+        <a:font script="Thai" typeface="Angsana New"/>
+        <a:font script="Ethi" typeface="Nyala"/>
+        <a:font script="Beng" typeface="Vrinda"/>
+        <a:font script="Gujr" typeface="Shruti"/>
+        <a:font script="Khmr" typeface="MoolBoran"/>
+        <a:font script="Knda" typeface="Tunga"/>
+        <a:font script="Guru" typeface="Raavi"/>
+        <a:font script="Cans" typeface="Euphemia"/>
+        <a:font script="Cher" typeface="Plantagenet Cherokee"/>
+        <a:font script="Yiii" typeface="Microsoft Yi Baiti"/>
+        <a:font script="Tibt" typeface="Microsoft Himalaya"/>
+        <a:font script="Thaa" typeface="MV Boli"/>
+        <a:font script="Deva" typeface="Mangal"/>
+        <a:font script="Telu" typeface="Gautami"/>
+        <a:font script="Taml" typeface="Latha"/>
+        <a:font script="Syrc" typeface="Estrangelo Edessa"/>
+        <a:font script="Orya" typeface="Kalinga"/>
+        <a:font script="Mlym" typeface="Kartika"/>
+        <a:font script="Laoo" typeface="DokChampa"/>
+        <a:font script="Sinh" typeface="Iskoola Pota"/>
+        <a:font script="Mong" typeface="Mongolian Baiti"/>
+        <a:font script="Viet" typeface="Times New Roman"/>
+        <a:font script="Uigh" typeface="Microsoft Uighur"/>
+        <a:font script="Geor" typeface="Sylfaen"/>
+        <a:font script="Armn" typeface="Arial"/>
+        <a:font script="Bugi" typeface="Leelawadee UI"/>
+        <a:font script="Bopo" typeface="Microsoft JhengHei"/>
+        <a:font script="Java" typeface="Javanese Text"/>
+        <a:font script="Lisu" typeface="Segoe UI"/>
+        <a:font script="Mymr" typeface="Myanmar Text"/>
+        <a:font script="Nkoo" typeface="Ebrima"/>
+        <a:font script="Olck" typeface="Nirmala UI"/>
+        <a:font script="Osma" typeface="Ebrima"/>
+        <a:font script="Phag" typeface="Phagspa"/>
+        <a:font script="Syrn" typeface="Estrangelo Edessa"/>
+        <a:font script="Syrj" typeface="Estrangelo Edessa"/>
+        <a:font script="Syre" typeface="Estrangelo Edessa"/>
+        <a:font script="Sora" typeface="Nirmala UI"/>
+        <a:font script="Tale" typeface="Microsoft Tai Le"/>
+        <a:font script="Talu" typeface="Microsoft New Tai Lue"/>
+        <a:font script="Tfng" typeface="Ebrima"/>
+      </a:majorFont>
+      <a:minorFont>
+        <a:latin typeface="Aptos" panose="02110004020202020204"/>
+        <a:ea typeface=""/>
+        <a:cs typeface=""/>
+        <a:font script="Jpan" typeface="游ゴシック"/>
+        <a:font script="Hang" typeface="맑은 고딕"/>
+        <a:font script="Hans" typeface="等线"/>
+        <a:font script="Hant" typeface="新細明體"/>
+        <a:font script="Arab" typeface="Arial"/>
+        <a:font script="Hebr" typeface="Arial"/>
+        <a:font script="Thai" typeface="Cordia New"/>
+        <a:font script="Ethi" typeface="Nyala"/>
+        <a:font script="Beng" typeface="Vrinda"/>
+        <a:font script="Gujr" typeface="Shruti"/>
+        <a:font script="Khmr" typeface="DaunPenh"/>
+        <a:font script="Knda" typeface="Tunga"/>
+        <a:font script="Guru" typeface="Raavi"/>
+        <a:font script="Cans" typeface="Euphemia"/>
+        <a:font script="Cher" typeface="Plantagenet Cherokee"/>
+        <a:font script="Yiii" typeface="Microsoft Yi Baiti"/>
+        <a:font script="Tibt" typeface="Microsoft Himalaya"/>
+        <a:font script="Thaa" typeface="MV Boli"/>
+        <a:font script="Deva" typeface="Mangal"/>
+        <a:font script="Telu" typeface="Gautami"/>
+        <a:font script="Taml" typeface="Latha"/>
+        <a:font script="Syrc" typeface="Estrangelo Edessa"/>
+        <a:font script="Orya" typeface="Kalinga"/>
+        <a:font script="Mlym" typeface="Kartika"/>
+        <a:font script="Laoo" typeface="DokChampa"/>
+        <a:font script="Sinh" typeface="Iskoola Pota"/>
+        <a:font script="Mong" typeface="Mongolian Baiti"/>
+        <a:font script="Viet" typeface="Arial"/>
+        <a:font script="Uigh" typeface="Microsoft Uighur"/>
+        <a:font script="Geor" typeface="Sylfaen"/>
+        <a:font script="Armn" typeface="Arial"/>
+        <a:font script="Bugi" typeface="Leelawadee UI"/>
+        <a:font script="Bopo" typeface="Microsoft JhengHei"/>
+        <a:font script="Java" typeface="Javanese Text"/>
+        <a:font script="Lisu" typeface="Segoe UI"/>
+        <a:font script="Mymr" typeface="Myanmar Text"/>
+        <a:font script="Nkoo" typeface="Ebrima"/>
+        <a:font script="Olck" typeface="Nirmala UI"/>
+        <a:font script="Osma" typeface="Ebrima"/>
+        <a:font script="Phag" typeface="Phagspa"/>
+        <a:font script="Syrn" typeface="Estrangelo Edessa"/>
+        <a:font script="Syrj" typeface="Estrangelo Edessa"/>
+        <a:font script="Syre" typeface="Estrangelo Edessa"/>
+        <a:font script="Sora" typeface="Nirmala UI"/>
+        <a:font script="Tale" typeface="Microsoft Tai Le"/>
+        <a:font script="Talu" typeface="Microsoft New Tai Lue"/>
+        <a:font script="Tfng" typeface="Ebrima"/>
+      </a:minorFont>
+    </a:fontScheme>
+    <a:fmtScheme name="Office">
+      <a:fillStyleLst>
+        <a:solidFill>
+          <a:schemeClr val="phClr"/>
+        </a:solidFill>
+        <a:gradFill rotWithShape="1">
+          <a:gsLst>
+            <a:gs pos="0">
+              <a:schemeClr val="phClr">
+                <a:lumMod val="110000"/>
+                <a:satMod val="105000"/>
+                <a:tint val="67000"/>
+              </a:schemeClr>
+            </a:gs>
+            <a:gs pos="50000">
+              <a:schemeClr val="phClr">
+                <a:lumMod val="105000"/>
+                <a:satMod val="103000"/>
+                <a:tint val="73000"/>
+              </a:schemeClr>
+            </a:gs>
+            <a:gs pos="100000">
+              <a:schemeClr val="phClr">
+                <a:lumMod val="105000"/>
+                <a:satMod val="109000"/>
+                <a:tint val="81000"/>
+              </a:schemeClr>
+            </a:gs>
+          </a:gsLst>
+          <a:lin ang="5400000" scaled="0"/>
+        </a:gradFill>
+        <a:gradFill rotWithShape="1">
+          <a:gsLst>
+            <a:gs pos="0">
+              <a:schemeClr val="phClr">
+                <a:satMod val="103000"/>
+                <a:lumMod val="102000"/>
+                <a:tint val="94000"/>
+              </a:schemeClr>
+            </a:gs>
+            <a:gs pos="50000">
+              <a:schemeClr val="phClr">
+                <a:satMod val="110000"/>
+                <a:lumMod val="100000"/>
+                <a:shade val="100000"/>
+              </a:schemeClr>
+            </a:gs>
+            <a:gs pos="100000">
+              <a:schemeClr val="phClr">
+                <a:lumMod val="99000"/>
+                <a:satMod val="120000"/>
+                <a:shade val="78000"/>
+              </a:schemeClr>
+            </a:gs>
+          </a:gsLst>
+          <a:lin ang="5400000" scaled="0"/>
+        </a:gradFill>
+      </a:fillStyleLst>
+      <a:lnStyleLst>
+        <a:ln w="12700" cap="flat" cmpd="sng" algn="ctr">
+          <a:solidFill>
+            <a:schemeClr val="phClr"/>
+          </a:solidFill>
+          <a:prstDash val="solid"/>
+          <a:miter lim="800000"/>
+        </a:ln>
+        <a:ln w="19050" cap="flat" cmpd="sng" algn="ctr">
+          <a:solidFill>
+            <a:schemeClr val="phClr"/>
+          </a:solidFill>
+          <a:prstDash val="solid"/>
+          <a:miter lim="800000"/>
+        </a:ln>
+        <a:ln w="25400" cap="flat" cmpd="sng" algn="ctr">
+          <a:solidFill>
+            <a:schemeClr val="phClr"/>
+          </a:solidFill>
+          <a:prstDash val="solid"/>
+          <a:miter lim="800000"/>
+        </a:ln>
+      </a:lnStyleLst>
+      <a:effectStyleLst>
+        <a:effectStyle>
+          <a:effectLst/>
+        </a:effectStyle>
+        <a:effectStyle>
+          <a:effectLst/>
+        </a:effectStyle>
+        <a:effectStyle>
+          <a:effectLst>
+            <a:outerShdw blurRad="57150" dist="19050" dir="5400000" algn="ctr" rotWithShape="0">
+              <a:srgbClr val="000000">
+                <a:alpha val="63000"/>
+              </a:srgbClr>
+            </a:outerShdw>
+          </a:effectLst>
+        </a:effectStyle>
+      </a:effectStyleLst>
+      <a:bgFillStyleLst>
+        <a:solidFill>
+          <a:schemeClr val="phClr"/>
+        </a:solidFill>
+        <a:solidFill>
+          <a:schemeClr val="phClr">
+            <a:tint val="95000"/>
+            <a:satMod val="170000"/>
+          </a:schemeClr>
+        </a:solidFill>
+        <a:gradFill rotWithShape="1">
+          <a:gsLst>
+            <a:gs pos="0">
+              <a:schemeClr val="phClr">
+                <a:tint val="93000"/>
+                <a:satMod val="150000"/>
+                <a:shade val="98000"/>
+                <a:lumMod val="102000"/>
+              </a:schemeClr>
+            </a:gs>
+            <a:gs pos="50000">
+              <a:schemeClr val="phClr">
+                <a:tint val="98000"/>
+                <a:satMod val="130000"/>
+                <a:shade val="90000"/>
+                <a:lumMod val="103000"/>
+              </a:schemeClr>
+            </a:gs>
+            <a:gs pos="100000">
+              <a:schemeClr val="phClr">
+                <a:shade val="63000"/>
+                <a:satMod val="120000"/>
+              </a:schemeClr>
+            </a:gs>
+          </a:gsLst>
+          <a:lin ang="5400000" scaled="0"/>
+        </a:gradFill>
+      </a:bgFillStyleLst>
+    </a:fmtScheme>
+  </a:themeElements>
+  <a:objectDefaults>
+    <a:lnDef>
+      <a:spPr/>
+      <a:bodyPr/>
+      <a:lstStyle/>
+      <a:style>
+        <a:lnRef idx="2">
+          <a:schemeClr val="accent1"/>
+        </a:lnRef>
+        <a:fillRef idx="0">
+          <a:schemeClr val="accent1"/>
+        </a:fillRef>
+        <a:effectRef idx="1">
+          <a:schemeClr val="accent1"/>
+        </a:effectRef>
+        <a:fontRef idx="minor">
+          <a:schemeClr val="tx1"/>
+        </a:fontRef>
+      </a:style>
+    </a:lnDef>
+  </a:objectDefaults>
+  <a:extraClrSchemeLst/>
+  <a:extLst>
+    <a:ext uri="{05A4C25C-085E-4340-85A3-A5531E510DB2}">
+      <thm15:themeFamily xmlns:thm15="http://schemas.microsoft.com/office/thememl/2012/main" name="Office Theme" id="{2E142A2C-CD16-42D6-873A-C26D2A0506FA}" vid="{1BDDFF52-6CD6-40A5-AB3C-68EB2F1E4D0A}"/>
+    </a:ext>
+  </a:extLst>
+</a:theme>
 </file>